--- a/المدرسة الحديثة في الإدارة ونظرياتها المعاصرة.pptx
+++ b/المدرسة الحديثة في الإدارة ونظرياتها المعاصرة.pptx
@@ -194,6 +194,9 @@
         </p15:guide>
       </p15:sldGuideLst>
     </p:ext>
+    <p:ext uri="{2D200454-40CA-4A62-9FC3-DE9A4176ACB9}">
+      <p15:notesGuideLst xmlns:p15="http://schemas.microsoft.com/office/powerpoint/2012/main"/>
+    </p:ext>
   </p:extLst>
 </p:presentation>
 </file>
@@ -203,12 +206,12 @@
   <pc:docChgLst>
     <pc:chgData name="Bushra Alharbi" userId="1ebed99a325c552f" providerId="LiveId" clId="{7E9390C9-CE98-4490-B8F4-5B736AED1368}"/>
     <pc:docChg chg="undo redo custSel modSld modMainMaster">
-      <pc:chgData name="Bushra Alharbi" userId="1ebed99a325c552f" providerId="LiveId" clId="{7E9390C9-CE98-4490-B8F4-5B736AED1368}" dt="2026-09-29T12:17:19.674" v="1394"/>
+      <pc:chgData name="Bushra Alharbi" userId="1ebed99a325c552f" providerId="LiveId" clId="{7E9390C9-CE98-4490-B8F4-5B736AED1368}" dt="2026-10-27T07:37:20.570" v="1406" actId="1076"/>
       <pc:docMkLst>
         <pc:docMk/>
       </pc:docMkLst>
       <pc:sldChg chg="addSp delSp modSp mod modTransition">
-        <pc:chgData name="Bushra Alharbi" userId="1ebed99a325c552f" providerId="LiveId" clId="{7E9390C9-CE98-4490-B8F4-5B736AED1368}" dt="2026-09-29T12:17:19.674" v="1394"/>
+        <pc:chgData name="Bushra Alharbi" userId="1ebed99a325c552f" providerId="LiveId" clId="{7E9390C9-CE98-4490-B8F4-5B736AED1368}" dt="2026-10-27T07:37:20.570" v="1406" actId="1076"/>
         <pc:sldMkLst>
           <pc:docMk/>
           <pc:sldMk cId="0" sldId="256"/>
@@ -219,14 +222,6 @@
             <pc:docMk/>
             <pc:sldMk cId="0" sldId="256"/>
             <ac:spMk id="2" creationId="{00000000-0000-0000-0000-000000000000}"/>
-          </ac:spMkLst>
-        </pc:spChg>
-        <pc:spChg chg="del mod">
-          <ac:chgData name="Bushra Alharbi" userId="1ebed99a325c552f" providerId="LiveId" clId="{7E9390C9-CE98-4490-B8F4-5B736AED1368}" dt="2026-09-29T06:56:21.299" v="37" actId="478"/>
-          <ac:spMkLst>
-            <pc:docMk/>
-            <pc:sldMk cId="0" sldId="256"/>
-            <ac:spMk id="4" creationId="{00000000-0000-0000-0000-000000000000}"/>
           </ac:spMkLst>
         </pc:spChg>
         <pc:spChg chg="mod">
@@ -253,16 +248,8 @@
             <ac:spMk id="7" creationId="{00000000-0000-0000-0000-000000000000}"/>
           </ac:spMkLst>
         </pc:spChg>
-        <pc:spChg chg="del mod">
-          <ac:chgData name="Bushra Alharbi" userId="1ebed99a325c552f" providerId="LiveId" clId="{7E9390C9-CE98-4490-B8F4-5B736AED1368}" dt="2026-09-29T06:55:39.879" v="3" actId="478"/>
-          <ac:spMkLst>
-            <pc:docMk/>
-            <pc:sldMk cId="0" sldId="256"/>
-            <ac:spMk id="8" creationId="{00000000-0000-0000-0000-000000000000}"/>
-          </ac:spMkLst>
-        </pc:spChg>
         <pc:spChg chg="add mod">
-          <ac:chgData name="Bushra Alharbi" userId="1ebed99a325c552f" providerId="LiveId" clId="{7E9390C9-CE98-4490-B8F4-5B736AED1368}" dt="2026-09-29T09:40:31.054" v="848" actId="2711"/>
+          <ac:chgData name="Bushra Alharbi" userId="1ebed99a325c552f" providerId="LiveId" clId="{7E9390C9-CE98-4490-B8F4-5B736AED1368}" dt="2026-10-27T07:37:20.570" v="1406" actId="1076"/>
           <ac:spMkLst>
             <pc:docMk/>
             <pc:sldMk cId="0" sldId="256"/>
@@ -277,38 +264,6 @@
             <ac:spMk id="10" creationId="{D13CDFBD-4790-6CFD-2AD5-EEF1DC234009}"/>
           </ac:spMkLst>
         </pc:spChg>
-        <pc:picChg chg="del mod">
-          <ac:chgData name="Bushra Alharbi" userId="1ebed99a325c552f" providerId="LiveId" clId="{7E9390C9-CE98-4490-B8F4-5B736AED1368}" dt="2026-09-29T06:56:24.345" v="38" actId="478"/>
-          <ac:picMkLst>
-            <pc:docMk/>
-            <pc:sldMk cId="0" sldId="256"/>
-            <ac:picMk id="3" creationId="{00000000-0000-0000-0000-000000000000}"/>
-          </ac:picMkLst>
-        </pc:picChg>
-        <pc:picChg chg="add del mod">
-          <ac:chgData name="Bushra Alharbi" userId="1ebed99a325c552f" providerId="LiveId" clId="{7E9390C9-CE98-4490-B8F4-5B736AED1368}" dt="2026-09-29T09:41:22.142" v="854" actId="478"/>
-          <ac:picMkLst>
-            <pc:docMk/>
-            <pc:sldMk cId="0" sldId="256"/>
-            <ac:picMk id="12" creationId="{0C8589A7-8284-641C-EA32-2CCE2849BEAE}"/>
-          </ac:picMkLst>
-        </pc:picChg>
-        <pc:picChg chg="add del mod">
-          <ac:chgData name="Bushra Alharbi" userId="1ebed99a325c552f" providerId="LiveId" clId="{7E9390C9-CE98-4490-B8F4-5B736AED1368}" dt="2026-09-29T09:43:34.167" v="868" actId="478"/>
-          <ac:picMkLst>
-            <pc:docMk/>
-            <pc:sldMk cId="0" sldId="256"/>
-            <ac:picMk id="14" creationId="{1A3DE2A7-4B68-C727-B3F7-99A0C9B611F4}"/>
-          </ac:picMkLst>
-        </pc:picChg>
-        <pc:picChg chg="add del mod">
-          <ac:chgData name="Bushra Alharbi" userId="1ebed99a325c552f" providerId="LiveId" clId="{7E9390C9-CE98-4490-B8F4-5B736AED1368}" dt="2026-09-29T09:47:27.798" v="883" actId="478"/>
-          <ac:picMkLst>
-            <pc:docMk/>
-            <pc:sldMk cId="0" sldId="256"/>
-            <ac:picMk id="16" creationId="{B5C003C6-4DA0-FDA7-038C-A9A9B5A874F1}"/>
-          </ac:picMkLst>
-        </pc:picChg>
       </pc:sldChg>
       <pc:sldChg chg="addSp delSp modSp mod modTransition">
         <pc:chgData name="Bushra Alharbi" userId="1ebed99a325c552f" providerId="LiveId" clId="{7E9390C9-CE98-4490-B8F4-5B736AED1368}" dt="2026-09-29T12:17:19.674" v="1394"/>
@@ -324,28 +279,12 @@
             <ac:spMk id="2" creationId="{00000000-0000-0000-0000-000000000000}"/>
           </ac:spMkLst>
         </pc:spChg>
-        <pc:spChg chg="del mod">
-          <ac:chgData name="Bushra Alharbi" userId="1ebed99a325c552f" providerId="LiveId" clId="{7E9390C9-CE98-4490-B8F4-5B736AED1368}" dt="2026-09-29T07:02:04.769" v="148" actId="478"/>
-          <ac:spMkLst>
-            <pc:docMk/>
-            <pc:sldMk cId="0" sldId="257"/>
-            <ac:spMk id="3" creationId="{00000000-0000-0000-0000-000000000000}"/>
-          </ac:spMkLst>
-        </pc:spChg>
         <pc:spChg chg="mod">
           <ac:chgData name="Bushra Alharbi" userId="1ebed99a325c552f" providerId="LiveId" clId="{7E9390C9-CE98-4490-B8F4-5B736AED1368}" dt="2026-09-29T09:42:30.980" v="863" actId="1076"/>
           <ac:spMkLst>
             <pc:docMk/>
             <pc:sldMk cId="0" sldId="257"/>
             <ac:spMk id="4" creationId="{00000000-0000-0000-0000-000000000000}"/>
-          </ac:spMkLst>
-        </pc:spChg>
-        <pc:spChg chg="del mod">
-          <ac:chgData name="Bushra Alharbi" userId="1ebed99a325c552f" providerId="LiveId" clId="{7E9390C9-CE98-4490-B8F4-5B736AED1368}" dt="2026-09-29T07:06:09.828" v="171" actId="478"/>
-          <ac:spMkLst>
-            <pc:docMk/>
-            <pc:sldMk cId="0" sldId="257"/>
-            <ac:spMk id="9" creationId="{00000000-0000-0000-0000-000000000000}"/>
           </ac:spMkLst>
         </pc:spChg>
         <pc:spChg chg="mod">
@@ -404,14 +343,6 @@
             <ac:spMk id="16" creationId="{00000000-0000-0000-0000-000000000000}"/>
           </ac:spMkLst>
         </pc:spChg>
-        <pc:picChg chg="del">
-          <ac:chgData name="Bushra Alharbi" userId="1ebed99a325c552f" providerId="LiveId" clId="{7E9390C9-CE98-4490-B8F4-5B736AED1368}" dt="2026-09-29T07:06:12.144" v="172" actId="478"/>
-          <ac:picMkLst>
-            <pc:docMk/>
-            <pc:sldMk cId="0" sldId="257"/>
-            <ac:picMk id="5" creationId="{00000000-0000-0000-0000-000000000000}"/>
-          </ac:picMkLst>
-        </pc:picChg>
         <pc:picChg chg="mod">
           <ac:chgData name="Bushra Alharbi" userId="1ebed99a325c552f" providerId="LiveId" clId="{7E9390C9-CE98-4490-B8F4-5B736AED1368}" dt="2026-09-29T07:03:25.316" v="154" actId="1076"/>
           <ac:picMkLst>
@@ -436,14 +367,6 @@
             <ac:picMk id="8" creationId="{00000000-0000-0000-0000-000000000000}"/>
           </ac:picMkLst>
         </pc:picChg>
-        <pc:picChg chg="add del">
-          <ac:chgData name="Bushra Alharbi" userId="1ebed99a325c552f" providerId="LiveId" clId="{7E9390C9-CE98-4490-B8F4-5B736AED1368}" dt="2026-09-29T09:43:30.390" v="867" actId="478"/>
-          <ac:picMkLst>
-            <pc:docMk/>
-            <pc:sldMk cId="0" sldId="257"/>
-            <ac:picMk id="18" creationId="{BDC15B16-16FC-FC1A-A0DB-D136CAC67B48}"/>
-          </ac:picMkLst>
-        </pc:picChg>
       </pc:sldChg>
       <pc:sldChg chg="addSp delSp modSp mod modTransition">
         <pc:chgData name="Bushra Alharbi" userId="1ebed99a325c552f" providerId="LiveId" clId="{7E9390C9-CE98-4490-B8F4-5B736AED1368}" dt="2026-09-29T12:17:19.674" v="1394"/>
@@ -451,14 +374,6 @@
           <pc:docMk/>
           <pc:sldMk cId="0" sldId="258"/>
         </pc:sldMkLst>
-        <pc:spChg chg="del mod">
-          <ac:chgData name="Bushra Alharbi" userId="1ebed99a325c552f" providerId="LiveId" clId="{7E9390C9-CE98-4490-B8F4-5B736AED1368}" dt="2026-09-29T07:06:02.133" v="169" actId="478"/>
-          <ac:spMkLst>
-            <pc:docMk/>
-            <pc:sldMk cId="0" sldId="258"/>
-            <ac:spMk id="8" creationId="{00000000-0000-0000-0000-000000000000}"/>
-          </ac:spMkLst>
-        </pc:spChg>
         <pc:spChg chg="mod">
           <ac:chgData name="Bushra Alharbi" userId="1ebed99a325c552f" providerId="LiveId" clId="{7E9390C9-CE98-4490-B8F4-5B736AED1368}" dt="2026-09-29T07:25:27.826" v="441" actId="2711"/>
           <ac:spMkLst>
@@ -507,198 +422,6 @@
             <ac:spMk id="14" creationId="{00000000-0000-0000-0000-000000000000}"/>
           </ac:spMkLst>
         </pc:spChg>
-        <pc:spChg chg="add del">
-          <ac:chgData name="Bushra Alharbi" userId="1ebed99a325c552f" providerId="LiveId" clId="{7E9390C9-CE98-4490-B8F4-5B736AED1368}" dt="2026-09-29T07:19:39.322" v="242" actId="478"/>
-          <ac:spMkLst>
-            <pc:docMk/>
-            <pc:sldMk cId="0" sldId="258"/>
-            <ac:spMk id="15" creationId="{37F03EC7-636A-12AE-3B09-D894CBBE6123}"/>
-          </ac:spMkLst>
-        </pc:spChg>
-        <pc:spChg chg="add del">
-          <ac:chgData name="Bushra Alharbi" userId="1ebed99a325c552f" providerId="LiveId" clId="{7E9390C9-CE98-4490-B8F4-5B736AED1368}" dt="2026-09-29T07:19:39.322" v="242" actId="478"/>
-          <ac:spMkLst>
-            <pc:docMk/>
-            <pc:sldMk cId="0" sldId="258"/>
-            <ac:spMk id="16" creationId="{03CDC0D3-6174-4794-1B86-295316458281}"/>
-          </ac:spMkLst>
-        </pc:spChg>
-        <pc:spChg chg="add del">
-          <ac:chgData name="Bushra Alharbi" userId="1ebed99a325c552f" providerId="LiveId" clId="{7E9390C9-CE98-4490-B8F4-5B736AED1368}" dt="2026-09-29T07:19:39.322" v="242" actId="478"/>
-          <ac:spMkLst>
-            <pc:docMk/>
-            <pc:sldMk cId="0" sldId="258"/>
-            <ac:spMk id="17" creationId="{BC82970C-6BED-C19F-DC4C-A19B5087326C}"/>
-          </ac:spMkLst>
-        </pc:spChg>
-        <pc:spChg chg="add del">
-          <ac:chgData name="Bushra Alharbi" userId="1ebed99a325c552f" providerId="LiveId" clId="{7E9390C9-CE98-4490-B8F4-5B736AED1368}" dt="2026-09-29T07:19:39.322" v="242" actId="478"/>
-          <ac:spMkLst>
-            <pc:docMk/>
-            <pc:sldMk cId="0" sldId="258"/>
-            <ac:spMk id="18" creationId="{100A5E7A-14F0-F540-DD43-4DE327B6459A}"/>
-          </ac:spMkLst>
-        </pc:spChg>
-        <pc:spChg chg="add del">
-          <ac:chgData name="Bushra Alharbi" userId="1ebed99a325c552f" providerId="LiveId" clId="{7E9390C9-CE98-4490-B8F4-5B736AED1368}" dt="2026-09-29T07:19:39.322" v="242" actId="478"/>
-          <ac:spMkLst>
-            <pc:docMk/>
-            <pc:sldMk cId="0" sldId="258"/>
-            <ac:spMk id="19" creationId="{654921FF-AC34-A103-6E89-6952623B9EEF}"/>
-          </ac:spMkLst>
-        </pc:spChg>
-        <pc:spChg chg="add del">
-          <ac:chgData name="Bushra Alharbi" userId="1ebed99a325c552f" providerId="LiveId" clId="{7E9390C9-CE98-4490-B8F4-5B736AED1368}" dt="2026-09-29T07:19:39.322" v="242" actId="478"/>
-          <ac:spMkLst>
-            <pc:docMk/>
-            <pc:sldMk cId="0" sldId="258"/>
-            <ac:spMk id="20" creationId="{D92C441A-D57E-509A-A300-A291C009AAA0}"/>
-          </ac:spMkLst>
-        </pc:spChg>
-        <pc:spChg chg="add del">
-          <ac:chgData name="Bushra Alharbi" userId="1ebed99a325c552f" providerId="LiveId" clId="{7E9390C9-CE98-4490-B8F4-5B736AED1368}" dt="2026-09-29T07:19:39.322" v="242" actId="478"/>
-          <ac:spMkLst>
-            <pc:docMk/>
-            <pc:sldMk cId="0" sldId="258"/>
-            <ac:spMk id="21" creationId="{94537EC4-764A-6FAA-C570-AEB78DAC75B7}"/>
-          </ac:spMkLst>
-        </pc:spChg>
-        <pc:spChg chg="add del mod">
-          <ac:chgData name="Bushra Alharbi" userId="1ebed99a325c552f" providerId="LiveId" clId="{7E9390C9-CE98-4490-B8F4-5B736AED1368}" dt="2026-09-29T07:19:56.863" v="247"/>
-          <ac:spMkLst>
-            <pc:docMk/>
-            <pc:sldMk cId="0" sldId="258"/>
-            <ac:spMk id="22" creationId="{F2253DD8-451D-E242-B93F-2AB094243911}"/>
-          </ac:spMkLst>
-        </pc:spChg>
-        <pc:spChg chg="add del">
-          <ac:chgData name="Bushra Alharbi" userId="1ebed99a325c552f" providerId="LiveId" clId="{7E9390C9-CE98-4490-B8F4-5B736AED1368}" dt="2026-09-29T07:19:56.863" v="245" actId="478"/>
-          <ac:spMkLst>
-            <pc:docMk/>
-            <pc:sldMk cId="0" sldId="258"/>
-            <ac:spMk id="23" creationId="{84435D2C-5F47-B7EF-88B1-5B86EBE97832}"/>
-          </ac:spMkLst>
-        </pc:spChg>
-        <pc:spChg chg="add del">
-          <ac:chgData name="Bushra Alharbi" userId="1ebed99a325c552f" providerId="LiveId" clId="{7E9390C9-CE98-4490-B8F4-5B736AED1368}" dt="2026-09-29T07:19:56.863" v="245" actId="478"/>
-          <ac:spMkLst>
-            <pc:docMk/>
-            <pc:sldMk cId="0" sldId="258"/>
-            <ac:spMk id="24" creationId="{9043F8DB-063C-ED8B-75FC-78A5B3770DB7}"/>
-          </ac:spMkLst>
-        </pc:spChg>
-        <pc:spChg chg="add del">
-          <ac:chgData name="Bushra Alharbi" userId="1ebed99a325c552f" providerId="LiveId" clId="{7E9390C9-CE98-4490-B8F4-5B736AED1368}" dt="2026-09-29T07:19:56.863" v="245" actId="478"/>
-          <ac:spMkLst>
-            <pc:docMk/>
-            <pc:sldMk cId="0" sldId="258"/>
-            <ac:spMk id="25" creationId="{2F266918-6157-DE22-863E-AC236547195B}"/>
-          </ac:spMkLst>
-        </pc:spChg>
-        <pc:spChg chg="add del">
-          <ac:chgData name="Bushra Alharbi" userId="1ebed99a325c552f" providerId="LiveId" clId="{7E9390C9-CE98-4490-B8F4-5B736AED1368}" dt="2026-09-29T07:19:56.863" v="245" actId="478"/>
-          <ac:spMkLst>
-            <pc:docMk/>
-            <pc:sldMk cId="0" sldId="258"/>
-            <ac:spMk id="26" creationId="{5E8B66BE-9CEB-B22F-4E7E-5BD8E41AB610}"/>
-          </ac:spMkLst>
-        </pc:spChg>
-        <pc:spChg chg="add del">
-          <ac:chgData name="Bushra Alharbi" userId="1ebed99a325c552f" providerId="LiveId" clId="{7E9390C9-CE98-4490-B8F4-5B736AED1368}" dt="2026-09-29T07:19:56.863" v="245" actId="478"/>
-          <ac:spMkLst>
-            <pc:docMk/>
-            <pc:sldMk cId="0" sldId="258"/>
-            <ac:spMk id="27" creationId="{553156BC-B8CE-0C25-0DF7-E3ADF9872F83}"/>
-          </ac:spMkLst>
-        </pc:spChg>
-        <pc:spChg chg="add del">
-          <ac:chgData name="Bushra Alharbi" userId="1ebed99a325c552f" providerId="LiveId" clId="{7E9390C9-CE98-4490-B8F4-5B736AED1368}" dt="2026-09-29T07:19:56.863" v="245" actId="478"/>
-          <ac:spMkLst>
-            <pc:docMk/>
-            <pc:sldMk cId="0" sldId="258"/>
-            <ac:spMk id="28" creationId="{25AAB5B8-B4C7-B2EC-A19D-2E49F6F12183}"/>
-          </ac:spMkLst>
-        </pc:spChg>
-        <pc:spChg chg="add del">
-          <ac:chgData name="Bushra Alharbi" userId="1ebed99a325c552f" providerId="LiveId" clId="{7E9390C9-CE98-4490-B8F4-5B736AED1368}" dt="2026-09-29T07:19:56.863" v="245" actId="478"/>
-          <ac:spMkLst>
-            <pc:docMk/>
-            <pc:sldMk cId="0" sldId="258"/>
-            <ac:spMk id="29" creationId="{8F3706CA-EBBA-B97A-EC6A-817D0A52F7C9}"/>
-          </ac:spMkLst>
-        </pc:spChg>
-        <pc:spChg chg="add del mod">
-          <ac:chgData name="Bushra Alharbi" userId="1ebed99a325c552f" providerId="LiveId" clId="{7E9390C9-CE98-4490-B8F4-5B736AED1368}" dt="2026-09-29T07:20:17.071" v="255" actId="478"/>
-          <ac:spMkLst>
-            <pc:docMk/>
-            <pc:sldMk cId="0" sldId="258"/>
-            <ac:spMk id="30" creationId="{03292440-8E16-5CA7-AEE2-B7C70F9A8CED}"/>
-          </ac:spMkLst>
-        </pc:spChg>
-        <pc:spChg chg="add del">
-          <ac:chgData name="Bushra Alharbi" userId="1ebed99a325c552f" providerId="LiveId" clId="{7E9390C9-CE98-4490-B8F4-5B736AED1368}" dt="2026-09-29T07:20:13.806" v="254" actId="478"/>
-          <ac:spMkLst>
-            <pc:docMk/>
-            <pc:sldMk cId="0" sldId="258"/>
-            <ac:spMk id="31" creationId="{EF510D59-E12A-91D2-739C-28CE54DD6945}"/>
-          </ac:spMkLst>
-        </pc:spChg>
-        <pc:spChg chg="add del">
-          <ac:chgData name="Bushra Alharbi" userId="1ebed99a325c552f" providerId="LiveId" clId="{7E9390C9-CE98-4490-B8F4-5B736AED1368}" dt="2026-09-29T07:20:13.806" v="254" actId="478"/>
-          <ac:spMkLst>
-            <pc:docMk/>
-            <pc:sldMk cId="0" sldId="258"/>
-            <ac:spMk id="32" creationId="{66CDC3F3-C57A-AEC2-1A85-AF72A6F3C1E1}"/>
-          </ac:spMkLst>
-        </pc:spChg>
-        <pc:spChg chg="add del">
-          <ac:chgData name="Bushra Alharbi" userId="1ebed99a325c552f" providerId="LiveId" clId="{7E9390C9-CE98-4490-B8F4-5B736AED1368}" dt="2026-09-29T07:20:13.806" v="254" actId="478"/>
-          <ac:spMkLst>
-            <pc:docMk/>
-            <pc:sldMk cId="0" sldId="258"/>
-            <ac:spMk id="33" creationId="{93F78AFD-9950-EE95-2A6A-75644EDB610A}"/>
-          </ac:spMkLst>
-        </pc:spChg>
-        <pc:spChg chg="add del">
-          <ac:chgData name="Bushra Alharbi" userId="1ebed99a325c552f" providerId="LiveId" clId="{7E9390C9-CE98-4490-B8F4-5B736AED1368}" dt="2026-09-29T07:20:13.806" v="254" actId="478"/>
-          <ac:spMkLst>
-            <pc:docMk/>
-            <pc:sldMk cId="0" sldId="258"/>
-            <ac:spMk id="34" creationId="{DBD2B11A-6BEA-B410-D1BE-7EB3087C00E8}"/>
-          </ac:spMkLst>
-        </pc:spChg>
-        <pc:spChg chg="add del">
-          <ac:chgData name="Bushra Alharbi" userId="1ebed99a325c552f" providerId="LiveId" clId="{7E9390C9-CE98-4490-B8F4-5B736AED1368}" dt="2026-09-29T07:20:13.806" v="254" actId="478"/>
-          <ac:spMkLst>
-            <pc:docMk/>
-            <pc:sldMk cId="0" sldId="258"/>
-            <ac:spMk id="35" creationId="{182E0084-F97D-E3C1-8979-F98CB868426E}"/>
-          </ac:spMkLst>
-        </pc:spChg>
-        <pc:spChg chg="add del">
-          <ac:chgData name="Bushra Alharbi" userId="1ebed99a325c552f" providerId="LiveId" clId="{7E9390C9-CE98-4490-B8F4-5B736AED1368}" dt="2026-09-29T07:20:13.806" v="254" actId="478"/>
-          <ac:spMkLst>
-            <pc:docMk/>
-            <pc:sldMk cId="0" sldId="258"/>
-            <ac:spMk id="36" creationId="{6A0D0C44-F5C4-0602-31D3-4879C38E17B1}"/>
-          </ac:spMkLst>
-        </pc:spChg>
-        <pc:spChg chg="add del">
-          <ac:chgData name="Bushra Alharbi" userId="1ebed99a325c552f" providerId="LiveId" clId="{7E9390C9-CE98-4490-B8F4-5B736AED1368}" dt="2026-09-29T07:20:13.806" v="254" actId="478"/>
-          <ac:spMkLst>
-            <pc:docMk/>
-            <pc:sldMk cId="0" sldId="258"/>
-            <ac:spMk id="37" creationId="{89DA9031-D244-7651-FC73-E514C4B1DD94}"/>
-          </ac:spMkLst>
-        </pc:spChg>
-        <pc:picChg chg="del">
-          <ac:chgData name="Bushra Alharbi" userId="1ebed99a325c552f" providerId="LiveId" clId="{7E9390C9-CE98-4490-B8F4-5B736AED1368}" dt="2026-09-29T07:06:04.548" v="170" actId="478"/>
-          <ac:picMkLst>
-            <pc:docMk/>
-            <pc:sldMk cId="0" sldId="258"/>
-            <ac:picMk id="2" creationId="{00000000-0000-0000-0000-000000000000}"/>
-          </ac:picMkLst>
-        </pc:picChg>
         <pc:picChg chg="mod">
           <ac:chgData name="Bushra Alharbi" userId="1ebed99a325c552f" providerId="LiveId" clId="{7E9390C9-CE98-4490-B8F4-5B736AED1368}" dt="2026-09-29T07:24:14.452" v="432" actId="1076"/>
           <ac:picMkLst>
@@ -737,14 +460,6 @@
             <pc:docMk/>
             <pc:sldMk cId="0" sldId="258"/>
             <ac:picMk id="7" creationId="{00000000-0000-0000-0000-000000000000}"/>
-          </ac:picMkLst>
-        </pc:picChg>
-        <pc:picChg chg="add del">
-          <ac:chgData name="Bushra Alharbi" userId="1ebed99a325c552f" providerId="LiveId" clId="{7E9390C9-CE98-4490-B8F4-5B736AED1368}" dt="2026-09-29T09:43:27.664" v="866" actId="478"/>
-          <ac:picMkLst>
-            <pc:docMk/>
-            <pc:sldMk cId="0" sldId="258"/>
-            <ac:picMk id="39" creationId="{82745BF0-A263-F5CF-E3C5-D0BB17474D00}"/>
           </ac:picMkLst>
         </pc:picChg>
       </pc:sldChg>
@@ -807,14 +522,6 @@
             <pc:docMk/>
             <pc:sldMk cId="0" sldId="260"/>
             <ac:spMk id="4" creationId="{00000000-0000-0000-0000-000000000000}"/>
-          </ac:spMkLst>
-        </pc:spChg>
-        <pc:spChg chg="del">
-          <ac:chgData name="Bushra Alharbi" userId="1ebed99a325c552f" providerId="LiveId" clId="{7E9390C9-CE98-4490-B8F4-5B736AED1368}" dt="2026-09-29T07:28:10.408" v="467" actId="478"/>
-          <ac:spMkLst>
-            <pc:docMk/>
-            <pc:sldMk cId="0" sldId="260"/>
-            <ac:spMk id="9" creationId="{00000000-0000-0000-0000-000000000000}"/>
           </ac:spMkLst>
         </pc:spChg>
         <pc:spChg chg="mod">
@@ -918,14 +625,6 @@
             <pc:docMk/>
             <pc:sldMk cId="0" sldId="261"/>
             <ac:spMk id="5" creationId="{00000000-0000-0000-0000-000000000000}"/>
-          </ac:spMkLst>
-        </pc:spChg>
-        <pc:spChg chg="del">
-          <ac:chgData name="Bushra Alharbi" userId="1ebed99a325c552f" providerId="LiveId" clId="{7E9390C9-CE98-4490-B8F4-5B736AED1368}" dt="2026-09-29T07:31:14.030" v="488" actId="478"/>
-          <ac:spMkLst>
-            <pc:docMk/>
-            <pc:sldMk cId="0" sldId="261"/>
-            <ac:spMk id="9" creationId="{00000000-0000-0000-0000-000000000000}"/>
           </ac:spMkLst>
         </pc:spChg>
         <pc:spChg chg="mod">
@@ -1047,14 +746,6 @@
             <ac:spMk id="4" creationId="{00000000-0000-0000-0000-000000000000}"/>
           </ac:spMkLst>
         </pc:spChg>
-        <pc:spChg chg="del mod">
-          <ac:chgData name="Bushra Alharbi" userId="1ebed99a325c552f" providerId="LiveId" clId="{7E9390C9-CE98-4490-B8F4-5B736AED1368}" dt="2026-09-29T07:34:01.735" v="518" actId="478"/>
-          <ac:spMkLst>
-            <pc:docMk/>
-            <pc:sldMk cId="0" sldId="262"/>
-            <ac:spMk id="9" creationId="{00000000-0000-0000-0000-000000000000}"/>
-          </ac:spMkLst>
-        </pc:spChg>
         <pc:spChg chg="mod">
           <ac:chgData name="Bushra Alharbi" userId="1ebed99a325c552f" providerId="LiveId" clId="{7E9390C9-CE98-4490-B8F4-5B736AED1368}" dt="2026-09-29T07:44:13.018" v="546" actId="2711"/>
           <ac:spMkLst>
@@ -1111,14 +802,6 @@
             <ac:spMk id="16" creationId="{00000000-0000-0000-0000-000000000000}"/>
           </ac:spMkLst>
         </pc:spChg>
-        <pc:picChg chg="del mod">
-          <ac:chgData name="Bushra Alharbi" userId="1ebed99a325c552f" providerId="LiveId" clId="{7E9390C9-CE98-4490-B8F4-5B736AED1368}" dt="2026-09-29T07:34:14.343" v="522" actId="478"/>
-          <ac:picMkLst>
-            <pc:docMk/>
-            <pc:sldMk cId="0" sldId="262"/>
-            <ac:picMk id="5" creationId="{00000000-0000-0000-0000-000000000000}"/>
-          </ac:picMkLst>
-        </pc:picChg>
       </pc:sldChg>
       <pc:sldChg chg="modSp mod modTransition">
         <pc:chgData name="Bushra Alharbi" userId="1ebed99a325c552f" providerId="LiveId" clId="{7E9390C9-CE98-4490-B8F4-5B736AED1368}" dt="2026-09-29T12:17:19.674" v="1394"/>
@@ -1181,14 +864,6 @@
             <ac:spMk id="4" creationId="{00000000-0000-0000-0000-000000000000}"/>
           </ac:spMkLst>
         </pc:spChg>
-        <pc:spChg chg="del mod">
-          <ac:chgData name="Bushra Alharbi" userId="1ebed99a325c552f" providerId="LiveId" clId="{7E9390C9-CE98-4490-B8F4-5B736AED1368}" dt="2026-09-29T07:46:08.643" v="558" actId="478"/>
-          <ac:spMkLst>
-            <pc:docMk/>
-            <pc:sldMk cId="0" sldId="264"/>
-            <ac:spMk id="9" creationId="{00000000-0000-0000-0000-000000000000}"/>
-          </ac:spMkLst>
-        </pc:spChg>
         <pc:spChg chg="mod">
           <ac:chgData name="Bushra Alharbi" userId="1ebed99a325c552f" providerId="LiveId" clId="{7E9390C9-CE98-4490-B8F4-5B736AED1368}" dt="2026-09-29T07:47:25.082" v="575" actId="2711"/>
           <ac:spMkLst>
@@ -1245,14 +920,6 @@
             <ac:spMk id="16" creationId="{00000000-0000-0000-0000-000000000000}"/>
           </ac:spMkLst>
         </pc:spChg>
-        <pc:picChg chg="del">
-          <ac:chgData name="Bushra Alharbi" userId="1ebed99a325c552f" providerId="LiveId" clId="{7E9390C9-CE98-4490-B8F4-5B736AED1368}" dt="2026-09-29T07:46:15.684" v="560" actId="478"/>
-          <ac:picMkLst>
-            <pc:docMk/>
-            <pc:sldMk cId="0" sldId="264"/>
-            <ac:picMk id="5" creationId="{00000000-0000-0000-0000-000000000000}"/>
-          </ac:picMkLst>
-        </pc:picChg>
       </pc:sldChg>
       <pc:sldChg chg="delSp modSp mod modTransition">
         <pc:chgData name="Bushra Alharbi" userId="1ebed99a325c552f" providerId="LiveId" clId="{7E9390C9-CE98-4490-B8F4-5B736AED1368}" dt="2026-09-29T12:17:19.674" v="1394"/>
@@ -1274,14 +941,6 @@
             <pc:docMk/>
             <pc:sldMk cId="0" sldId="265"/>
             <ac:spMk id="3" creationId="{00000000-0000-0000-0000-000000000000}"/>
-          </ac:spMkLst>
-        </pc:spChg>
-        <pc:spChg chg="del mod">
-          <ac:chgData name="Bushra Alharbi" userId="1ebed99a325c552f" providerId="LiveId" clId="{7E9390C9-CE98-4490-B8F4-5B736AED1368}" dt="2026-09-29T07:48:22.068" v="579" actId="478"/>
-          <ac:spMkLst>
-            <pc:docMk/>
-            <pc:sldMk cId="0" sldId="265"/>
-            <ac:spMk id="5" creationId="{00000000-0000-0000-0000-000000000000}"/>
           </ac:spMkLst>
         </pc:spChg>
         <pc:spChg chg="mod">
@@ -1308,14 +967,6 @@
             <ac:spMk id="8" creationId="{00000000-0000-0000-0000-000000000000}"/>
           </ac:spMkLst>
         </pc:spChg>
-        <pc:picChg chg="del">
-          <ac:chgData name="Bushra Alharbi" userId="1ebed99a325c552f" providerId="LiveId" clId="{7E9390C9-CE98-4490-B8F4-5B736AED1368}" dt="2026-09-29T07:48:24.506" v="580" actId="478"/>
-          <ac:picMkLst>
-            <pc:docMk/>
-            <pc:sldMk cId="0" sldId="265"/>
-            <ac:picMk id="4" creationId="{00000000-0000-0000-0000-000000000000}"/>
-          </ac:picMkLst>
-        </pc:picChg>
       </pc:sldChg>
       <pc:sldChg chg="delSp modSp mod modTransition">
         <pc:chgData name="Bushra Alharbi" userId="1ebed99a325c552f" providerId="LiveId" clId="{7E9390C9-CE98-4490-B8F4-5B736AED1368}" dt="2026-09-29T12:17:19.674" v="1394"/>
@@ -1361,14 +1012,6 @@
             <pc:docMk/>
             <pc:sldMk cId="0" sldId="266"/>
             <ac:spMk id="9" creationId="{00000000-0000-0000-0000-000000000000}"/>
-          </ac:spMkLst>
-        </pc:spChg>
-        <pc:spChg chg="del">
-          <ac:chgData name="Bushra Alharbi" userId="1ebed99a325c552f" providerId="LiveId" clId="{7E9390C9-CE98-4490-B8F4-5B736AED1368}" dt="2026-09-29T07:49:27.594" v="587" actId="478"/>
-          <ac:spMkLst>
-            <pc:docMk/>
-            <pc:sldMk cId="0" sldId="266"/>
-            <ac:spMk id="11" creationId="{00000000-0000-0000-0000-000000000000}"/>
           </ac:spMkLst>
         </pc:spChg>
         <pc:spChg chg="mod">
@@ -1459,14 +1102,6 @@
             <ac:spMk id="24" creationId="{00000000-0000-0000-0000-000000000000}"/>
           </ac:spMkLst>
         </pc:spChg>
-        <pc:picChg chg="del">
-          <ac:chgData name="Bushra Alharbi" userId="1ebed99a325c552f" providerId="LiveId" clId="{7E9390C9-CE98-4490-B8F4-5B736AED1368}" dt="2026-09-29T07:49:30.565" v="588" actId="478"/>
-          <ac:picMkLst>
-            <pc:docMk/>
-            <pc:sldMk cId="0" sldId="266"/>
-            <ac:picMk id="10" creationId="{00000000-0000-0000-0000-000000000000}"/>
-          </ac:picMkLst>
-        </pc:picChg>
       </pc:sldChg>
       <pc:sldChg chg="delSp modSp mod modTransition">
         <pc:chgData name="Bushra Alharbi" userId="1ebed99a325c552f" providerId="LiveId" clId="{7E9390C9-CE98-4490-B8F4-5B736AED1368}" dt="2026-09-29T12:17:19.674" v="1394"/>
@@ -1496,14 +1131,6 @@
             <pc:docMk/>
             <pc:sldMk cId="0" sldId="267"/>
             <ac:spMk id="4" creationId="{00000000-0000-0000-0000-000000000000}"/>
-          </ac:spMkLst>
-        </pc:spChg>
-        <pc:spChg chg="del mod">
-          <ac:chgData name="Bushra Alharbi" userId="1ebed99a325c552f" providerId="LiveId" clId="{7E9390C9-CE98-4490-B8F4-5B736AED1368}" dt="2026-09-29T08:23:31.323" v="637" actId="478"/>
-          <ac:spMkLst>
-            <pc:docMk/>
-            <pc:sldMk cId="0" sldId="267"/>
-            <ac:spMk id="9" creationId="{00000000-0000-0000-0000-000000000000}"/>
           </ac:spMkLst>
         </pc:spChg>
         <pc:spChg chg="mod">
@@ -1562,14 +1189,6 @@
             <ac:spMk id="16" creationId="{00000000-0000-0000-0000-000000000000}"/>
           </ac:spMkLst>
         </pc:spChg>
-        <pc:picChg chg="del">
-          <ac:chgData name="Bushra Alharbi" userId="1ebed99a325c552f" providerId="LiveId" clId="{7E9390C9-CE98-4490-B8F4-5B736AED1368}" dt="2026-09-29T08:23:40.032" v="638" actId="478"/>
-          <ac:picMkLst>
-            <pc:docMk/>
-            <pc:sldMk cId="0" sldId="267"/>
-            <ac:picMk id="5" creationId="{00000000-0000-0000-0000-000000000000}"/>
-          </ac:picMkLst>
-        </pc:picChg>
       </pc:sldChg>
       <pc:sldChg chg="delSp modSp mod modTransition">
         <pc:chgData name="Bushra Alharbi" userId="1ebed99a325c552f" providerId="LiveId" clId="{7E9390C9-CE98-4490-B8F4-5B736AED1368}" dt="2026-09-29T12:17:19.674" v="1394"/>
@@ -1599,14 +1218,6 @@
             <pc:docMk/>
             <pc:sldMk cId="0" sldId="268"/>
             <ac:spMk id="4" creationId="{00000000-0000-0000-0000-000000000000}"/>
-          </ac:spMkLst>
-        </pc:spChg>
-        <pc:spChg chg="del mod">
-          <ac:chgData name="Bushra Alharbi" userId="1ebed99a325c552f" providerId="LiveId" clId="{7E9390C9-CE98-4490-B8F4-5B736AED1368}" dt="2026-09-29T08:29:12.328" v="652" actId="478"/>
-          <ac:spMkLst>
-            <pc:docMk/>
-            <pc:sldMk cId="0" sldId="268"/>
-            <ac:spMk id="9" creationId="{00000000-0000-0000-0000-000000000000}"/>
           </ac:spMkLst>
         </pc:spChg>
         <pc:spChg chg="mod">
@@ -1665,14 +1276,6 @@
             <ac:spMk id="16" creationId="{00000000-0000-0000-0000-000000000000}"/>
           </ac:spMkLst>
         </pc:spChg>
-        <pc:picChg chg="del">
-          <ac:chgData name="Bushra Alharbi" userId="1ebed99a325c552f" providerId="LiveId" clId="{7E9390C9-CE98-4490-B8F4-5B736AED1368}" dt="2026-09-29T08:29:14.887" v="653" actId="478"/>
-          <ac:picMkLst>
-            <pc:docMk/>
-            <pc:sldMk cId="0" sldId="268"/>
-            <ac:picMk id="5" creationId="{00000000-0000-0000-0000-000000000000}"/>
-          </ac:picMkLst>
-        </pc:picChg>
       </pc:sldChg>
       <pc:sldChg chg="delSp modSp mod modTransition">
         <pc:chgData name="Bushra Alharbi" userId="1ebed99a325c552f" providerId="LiveId" clId="{7E9390C9-CE98-4490-B8F4-5B736AED1368}" dt="2026-09-29T12:17:19.674" v="1394"/>
@@ -1694,14 +1297,6 @@
             <pc:docMk/>
             <pc:sldMk cId="0" sldId="269"/>
             <ac:spMk id="5" creationId="{00000000-0000-0000-0000-000000000000}"/>
-          </ac:spMkLst>
-        </pc:spChg>
-        <pc:spChg chg="del mod">
-          <ac:chgData name="Bushra Alharbi" userId="1ebed99a325c552f" providerId="LiveId" clId="{7E9390C9-CE98-4490-B8F4-5B736AED1368}" dt="2026-09-29T08:29:50.592" v="660" actId="478"/>
-          <ac:spMkLst>
-            <pc:docMk/>
-            <pc:sldMk cId="0" sldId="269"/>
-            <ac:spMk id="10" creationId="{00000000-0000-0000-0000-000000000000}"/>
           </ac:spMkLst>
         </pc:spChg>
         <pc:spChg chg="mod">
@@ -1760,14 +1355,6 @@
             <ac:spMk id="18" creationId="{00000000-0000-0000-0000-000000000000}"/>
           </ac:spMkLst>
         </pc:spChg>
-        <pc:picChg chg="del">
-          <ac:chgData name="Bushra Alharbi" userId="1ebed99a325c552f" providerId="LiveId" clId="{7E9390C9-CE98-4490-B8F4-5B736AED1368}" dt="2026-09-29T08:29:48.551" v="659" actId="478"/>
-          <ac:picMkLst>
-            <pc:docMk/>
-            <pc:sldMk cId="0" sldId="269"/>
-            <ac:picMk id="6" creationId="{00000000-0000-0000-0000-000000000000}"/>
-          </ac:picMkLst>
-        </pc:picChg>
         <pc:picChg chg="mod">
           <ac:chgData name="Bushra Alharbi" userId="1ebed99a325c552f" providerId="LiveId" clId="{7E9390C9-CE98-4490-B8F4-5B736AED1368}" dt="2026-09-29T08:30:34.280" v="661" actId="1076"/>
           <ac:picMkLst>
@@ -1805,14 +1392,6 @@
             <pc:docMk/>
             <pc:sldMk cId="0" sldId="270"/>
             <ac:spMk id="5" creationId="{00000000-0000-0000-0000-000000000000}"/>
-          </ac:spMkLst>
-        </pc:spChg>
-        <pc:spChg chg="del">
-          <ac:chgData name="Bushra Alharbi" userId="1ebed99a325c552f" providerId="LiveId" clId="{7E9390C9-CE98-4490-B8F4-5B736AED1368}" dt="2026-09-29T08:30:51.167" v="664" actId="478"/>
-          <ac:spMkLst>
-            <pc:docMk/>
-            <pc:sldMk cId="0" sldId="270"/>
-            <ac:spMk id="9" creationId="{00000000-0000-0000-0000-000000000000}"/>
           </ac:spMkLst>
         </pc:spChg>
         <pc:spChg chg="mod">
@@ -1887,14 +1466,6 @@
             <ac:spMk id="18" creationId="{00000000-0000-0000-0000-000000000000}"/>
           </ac:spMkLst>
         </pc:spChg>
-        <pc:picChg chg="del">
-          <ac:chgData name="Bushra Alharbi" userId="1ebed99a325c552f" providerId="LiveId" clId="{7E9390C9-CE98-4490-B8F4-5B736AED1368}" dt="2026-09-29T08:30:56.161" v="665" actId="478"/>
-          <ac:picMkLst>
-            <pc:docMk/>
-            <pc:sldMk cId="0" sldId="270"/>
-            <ac:picMk id="6" creationId="{00000000-0000-0000-0000-000000000000}"/>
-          </ac:picMkLst>
-        </pc:picChg>
       </pc:sldChg>
       <pc:sldChg chg="addSp delSp modSp mod modTransition">
         <pc:chgData name="Bushra Alharbi" userId="1ebed99a325c552f" providerId="LiveId" clId="{7E9390C9-CE98-4490-B8F4-5B736AED1368}" dt="2026-09-29T12:17:19.674" v="1394"/>
@@ -1902,14 +1473,6 @@
           <pc:docMk/>
           <pc:sldMk cId="0" sldId="271"/>
         </pc:sldMkLst>
-        <pc:spChg chg="del mod">
-          <ac:chgData name="Bushra Alharbi" userId="1ebed99a325c552f" providerId="LiveId" clId="{7E9390C9-CE98-4490-B8F4-5B736AED1368}" dt="2026-09-29T08:49:32.890" v="680" actId="478"/>
-          <ac:spMkLst>
-            <pc:docMk/>
-            <pc:sldMk cId="0" sldId="271"/>
-            <ac:spMk id="7" creationId="{00000000-0000-0000-0000-000000000000}"/>
-          </ac:spMkLst>
-        </pc:spChg>
         <pc:spChg chg="mod">
           <ac:chgData name="Bushra Alharbi" userId="1ebed99a325c552f" providerId="LiveId" clId="{7E9390C9-CE98-4490-B8F4-5B736AED1368}" dt="2026-09-29T08:55:05.213" v="727" actId="121"/>
           <ac:spMkLst>
@@ -1950,22 +1513,6 @@
             <ac:spMk id="12" creationId="{00000000-0000-0000-0000-000000000000}"/>
           </ac:spMkLst>
         </pc:spChg>
-        <pc:spChg chg="add del">
-          <ac:chgData name="Bushra Alharbi" userId="1ebed99a325c552f" providerId="LiveId" clId="{7E9390C9-CE98-4490-B8F4-5B736AED1368}" dt="2026-09-29T08:52:30.807" v="700" actId="22"/>
-          <ac:spMkLst>
-            <pc:docMk/>
-            <pc:sldMk cId="0" sldId="271"/>
-            <ac:spMk id="14" creationId="{3241982C-4E17-9650-4DF4-66F168CD96A7}"/>
-          </ac:spMkLst>
-        </pc:spChg>
-        <pc:picChg chg="del">
-          <ac:chgData name="Bushra Alharbi" userId="1ebed99a325c552f" providerId="LiveId" clId="{7E9390C9-CE98-4490-B8F4-5B736AED1368}" dt="2026-09-29T08:49:35.260" v="681" actId="478"/>
-          <ac:picMkLst>
-            <pc:docMk/>
-            <pc:sldMk cId="0" sldId="271"/>
-            <ac:picMk id="2" creationId="{00000000-0000-0000-0000-000000000000}"/>
-          </ac:picMkLst>
-        </pc:picChg>
         <pc:picChg chg="mod">
           <ac:chgData name="Bushra Alharbi" userId="1ebed99a325c552f" providerId="LiveId" clId="{7E9390C9-CE98-4490-B8F4-5B736AED1368}" dt="2026-09-29T08:54:58.279" v="726" actId="1076"/>
           <ac:picMkLst>
@@ -2019,14 +1566,6 @@
             <pc:docMk/>
             <pc:sldMk cId="0" sldId="272"/>
             <ac:spMk id="4" creationId="{00000000-0000-0000-0000-000000000000}"/>
-          </ac:spMkLst>
-        </pc:spChg>
-        <pc:spChg chg="del mod">
-          <ac:chgData name="Bushra Alharbi" userId="1ebed99a325c552f" providerId="LiveId" clId="{7E9390C9-CE98-4490-B8F4-5B736AED1368}" dt="2026-09-29T08:55:59.696" v="736" actId="478"/>
-          <ac:spMkLst>
-            <pc:docMk/>
-            <pc:sldMk cId="0" sldId="272"/>
-            <ac:spMk id="9" creationId="{00000000-0000-0000-0000-000000000000}"/>
           </ac:spMkLst>
         </pc:spChg>
         <pc:spChg chg="mod">
@@ -2085,14 +1624,6 @@
             <ac:spMk id="16" creationId="{00000000-0000-0000-0000-000000000000}"/>
           </ac:spMkLst>
         </pc:spChg>
-        <pc:picChg chg="del">
-          <ac:chgData name="Bushra Alharbi" userId="1ebed99a325c552f" providerId="LiveId" clId="{7E9390C9-CE98-4490-B8F4-5B736AED1368}" dt="2026-09-29T08:55:55.874" v="735" actId="478"/>
-          <ac:picMkLst>
-            <pc:docMk/>
-            <pc:sldMk cId="0" sldId="272"/>
-            <ac:picMk id="5" creationId="{00000000-0000-0000-0000-000000000000}"/>
-          </ac:picMkLst>
-        </pc:picChg>
       </pc:sldChg>
       <pc:sldChg chg="modSp mod modTransition">
         <pc:chgData name="Bushra Alharbi" userId="1ebed99a325c552f" providerId="LiveId" clId="{7E9390C9-CE98-4490-B8F4-5B736AED1368}" dt="2026-09-29T12:17:19.674" v="1394"/>
@@ -2129,14 +1660,6 @@
             <pc:docMk/>
             <pc:sldMk cId="0" sldId="274"/>
             <ac:spMk id="3" creationId="{00000000-0000-0000-0000-000000000000}"/>
-          </ac:spMkLst>
-        </pc:spChg>
-        <pc:spChg chg="del mod">
-          <ac:chgData name="Bushra Alharbi" userId="1ebed99a325c552f" providerId="LiveId" clId="{7E9390C9-CE98-4490-B8F4-5B736AED1368}" dt="2026-09-29T09:52:49.894" v="888" actId="478"/>
-          <ac:spMkLst>
-            <pc:docMk/>
-            <pc:sldMk cId="0" sldId="274"/>
-            <ac:spMk id="7" creationId="{00000000-0000-0000-0000-000000000000}"/>
           </ac:spMkLst>
         </pc:spChg>
         <pc:spChg chg="mod">
@@ -2242,14 +1765,6 @@
             <ac:spMk id="4" creationId="{00000000-0000-0000-0000-000000000000}"/>
           </ac:spMkLst>
         </pc:spChg>
-        <pc:spChg chg="del mod">
-          <ac:chgData name="Bushra Alharbi" userId="1ebed99a325c552f" providerId="LiveId" clId="{7E9390C9-CE98-4490-B8F4-5B736AED1368}" dt="2026-09-29T09:59:17.379" v="993" actId="478"/>
-          <ac:spMkLst>
-            <pc:docMk/>
-            <pc:sldMk cId="0" sldId="275"/>
-            <ac:spMk id="9" creationId="{00000000-0000-0000-0000-000000000000}"/>
-          </ac:spMkLst>
-        </pc:spChg>
         <pc:spChg chg="mod">
           <ac:chgData name="Bushra Alharbi" userId="1ebed99a325c552f" providerId="LiveId" clId="{7E9390C9-CE98-4490-B8F4-5B736AED1368}" dt="2026-09-29T09:59:13.298" v="992" actId="2711"/>
           <ac:spMkLst>
@@ -2298,14 +1813,6 @@
             <ac:spMk id="16" creationId="{00000000-0000-0000-0000-000000000000}"/>
           </ac:spMkLst>
         </pc:spChg>
-        <pc:picChg chg="del">
-          <ac:chgData name="Bushra Alharbi" userId="1ebed99a325c552f" providerId="LiveId" clId="{7E9390C9-CE98-4490-B8F4-5B736AED1368}" dt="2026-09-29T09:59:19.736" v="994" actId="478"/>
-          <ac:picMkLst>
-            <pc:docMk/>
-            <pc:sldMk cId="0" sldId="275"/>
-            <ac:picMk id="5" creationId="{00000000-0000-0000-0000-000000000000}"/>
-          </ac:picMkLst>
-        </pc:picChg>
       </pc:sldChg>
       <pc:sldChg chg="delSp modSp mod modTransition">
         <pc:chgData name="Bushra Alharbi" userId="1ebed99a325c552f" providerId="LiveId" clId="{7E9390C9-CE98-4490-B8F4-5B736AED1368}" dt="2026-09-29T12:17:19.674" v="1394"/>
@@ -2327,14 +1834,6 @@
             <pc:docMk/>
             <pc:sldMk cId="0" sldId="276"/>
             <ac:spMk id="7" creationId="{00000000-0000-0000-0000-000000000000}"/>
-          </ac:spMkLst>
-        </pc:spChg>
-        <pc:spChg chg="del mod">
-          <ac:chgData name="Bushra Alharbi" userId="1ebed99a325c552f" providerId="LiveId" clId="{7E9390C9-CE98-4490-B8F4-5B736AED1368}" dt="2026-09-29T10:00:02.698" v="996" actId="478"/>
-          <ac:spMkLst>
-            <pc:docMk/>
-            <pc:sldMk cId="0" sldId="276"/>
-            <ac:spMk id="11" creationId="{00000000-0000-0000-0000-000000000000}"/>
           </ac:spMkLst>
         </pc:spChg>
         <pc:spChg chg="mod">
@@ -2393,14 +1892,6 @@
             <ac:spMk id="24" creationId="{00000000-0000-0000-0000-000000000000}"/>
           </ac:spMkLst>
         </pc:spChg>
-        <pc:picChg chg="del mod">
-          <ac:chgData name="Bushra Alharbi" userId="1ebed99a325c552f" providerId="LiveId" clId="{7E9390C9-CE98-4490-B8F4-5B736AED1368}" dt="2026-09-29T10:00:22.820" v="998" actId="478"/>
-          <ac:picMkLst>
-            <pc:docMk/>
-            <pc:sldMk cId="0" sldId="276"/>
-            <ac:picMk id="10" creationId="{00000000-0000-0000-0000-000000000000}"/>
-          </ac:picMkLst>
-        </pc:picChg>
       </pc:sldChg>
       <pc:sldChg chg="delSp modSp mod modTransition">
         <pc:chgData name="Bushra Alharbi" userId="1ebed99a325c552f" providerId="LiveId" clId="{7E9390C9-CE98-4490-B8F4-5B736AED1368}" dt="2026-09-29T12:17:19.674" v="1394"/>
@@ -2438,14 +1929,6 @@
             <pc:docMk/>
             <pc:sldMk cId="0" sldId="277"/>
             <ac:spMk id="9" creationId="{00000000-0000-0000-0000-000000000000}"/>
-          </ac:spMkLst>
-        </pc:spChg>
-        <pc:spChg chg="del">
-          <ac:chgData name="Bushra Alharbi" userId="1ebed99a325c552f" providerId="LiveId" clId="{7E9390C9-CE98-4490-B8F4-5B736AED1368}" dt="2026-09-29T09:00:57.880" v="743" actId="478"/>
-          <ac:spMkLst>
-            <pc:docMk/>
-            <pc:sldMk cId="0" sldId="277"/>
-            <ac:spMk id="13" creationId="{00000000-0000-0000-0000-000000000000}"/>
           </ac:spMkLst>
         </pc:spChg>
         <pc:spChg chg="mod">
@@ -2552,14 +2035,6 @@
             <ac:spMk id="29" creationId="{00000000-0000-0000-0000-000000000000}"/>
           </ac:spMkLst>
         </pc:spChg>
-        <pc:picChg chg="del">
-          <ac:chgData name="Bushra Alharbi" userId="1ebed99a325c552f" providerId="LiveId" clId="{7E9390C9-CE98-4490-B8F4-5B736AED1368}" dt="2026-09-29T09:01:05.774" v="744" actId="478"/>
-          <ac:picMkLst>
-            <pc:docMk/>
-            <pc:sldMk cId="0" sldId="277"/>
-            <ac:picMk id="12" creationId="{00000000-0000-0000-0000-000000000000}"/>
-          </ac:picMkLst>
-        </pc:picChg>
       </pc:sldChg>
       <pc:sldChg chg="delSp modSp mod modTransition">
         <pc:chgData name="Bushra Alharbi" userId="1ebed99a325c552f" providerId="LiveId" clId="{7E9390C9-CE98-4490-B8F4-5B736AED1368}" dt="2026-09-29T12:17:19.674" v="1394"/>
@@ -2589,14 +2064,6 @@
             <pc:docMk/>
             <pc:sldMk cId="0" sldId="278"/>
             <ac:spMk id="4" creationId="{00000000-0000-0000-0000-000000000000}"/>
-          </ac:spMkLst>
-        </pc:spChg>
-        <pc:spChg chg="del mod">
-          <ac:chgData name="Bushra Alharbi" userId="1ebed99a325c552f" providerId="LiveId" clId="{7E9390C9-CE98-4490-B8F4-5B736AED1368}" dt="2026-09-29T09:19:23.874" v="767" actId="478"/>
-          <ac:spMkLst>
-            <pc:docMk/>
-            <pc:sldMk cId="0" sldId="278"/>
-            <ac:spMk id="9" creationId="{00000000-0000-0000-0000-000000000000}"/>
           </ac:spMkLst>
         </pc:spChg>
         <pc:spChg chg="mod">
@@ -2655,14 +2122,6 @@
             <ac:spMk id="16" creationId="{00000000-0000-0000-0000-000000000000}"/>
           </ac:spMkLst>
         </pc:spChg>
-        <pc:picChg chg="del">
-          <ac:chgData name="Bushra Alharbi" userId="1ebed99a325c552f" providerId="LiveId" clId="{7E9390C9-CE98-4490-B8F4-5B736AED1368}" dt="2026-09-29T09:19:26.876" v="768" actId="478"/>
-          <ac:picMkLst>
-            <pc:docMk/>
-            <pc:sldMk cId="0" sldId="278"/>
-            <ac:picMk id="5" creationId="{00000000-0000-0000-0000-000000000000}"/>
-          </ac:picMkLst>
-        </pc:picChg>
       </pc:sldChg>
       <pc:sldChg chg="delSp modSp mod modTransition">
         <pc:chgData name="Bushra Alharbi" userId="1ebed99a325c552f" providerId="LiveId" clId="{7E9390C9-CE98-4490-B8F4-5B736AED1368}" dt="2026-09-29T12:17:19.674" v="1394"/>
@@ -2670,14 +2129,6 @@
           <pc:docMk/>
           <pc:sldMk cId="0" sldId="279"/>
         </pc:sldMkLst>
-        <pc:spChg chg="del mod">
-          <ac:chgData name="Bushra Alharbi" userId="1ebed99a325c552f" providerId="LiveId" clId="{7E9390C9-CE98-4490-B8F4-5B736AED1368}" dt="2026-09-29T09:20:18.554" v="774" actId="478"/>
-          <ac:spMkLst>
-            <pc:docMk/>
-            <pc:sldMk cId="0" sldId="279"/>
-            <ac:spMk id="6" creationId="{00000000-0000-0000-0000-000000000000}"/>
-          </ac:spMkLst>
-        </pc:spChg>
         <pc:spChg chg="mod">
           <ac:chgData name="Bushra Alharbi" userId="1ebed99a325c552f" providerId="LiveId" clId="{7E9390C9-CE98-4490-B8F4-5B736AED1368}" dt="2026-09-29T09:23:26.965" v="796" actId="2711"/>
           <ac:spMkLst>
@@ -2710,14 +2161,6 @@
             <ac:spMk id="10" creationId="{00000000-0000-0000-0000-000000000000}"/>
           </ac:spMkLst>
         </pc:spChg>
-        <pc:picChg chg="del">
-          <ac:chgData name="Bushra Alharbi" userId="1ebed99a325c552f" providerId="LiveId" clId="{7E9390C9-CE98-4490-B8F4-5B736AED1368}" dt="2026-09-29T09:20:20.178" v="775" actId="478"/>
-          <ac:picMkLst>
-            <pc:docMk/>
-            <pc:sldMk cId="0" sldId="279"/>
-            <ac:picMk id="2" creationId="{00000000-0000-0000-0000-000000000000}"/>
-          </ac:picMkLst>
-        </pc:picChg>
         <pc:picChg chg="mod">
           <ac:chgData name="Bushra Alharbi" userId="1ebed99a325c552f" providerId="LiveId" clId="{7E9390C9-CE98-4490-B8F4-5B736AED1368}" dt="2026-09-29T10:03:02.149" v="999" actId="1076"/>
           <ac:picMkLst>
@@ -2773,14 +2216,6 @@
             <ac:spMk id="4" creationId="{00000000-0000-0000-0000-000000000000}"/>
           </ac:spMkLst>
         </pc:spChg>
-        <pc:spChg chg="del mod">
-          <ac:chgData name="Bushra Alharbi" userId="1ebed99a325c552f" providerId="LiveId" clId="{7E9390C9-CE98-4490-B8F4-5B736AED1368}" dt="2026-09-29T09:23:35.644" v="798" actId="478"/>
-          <ac:spMkLst>
-            <pc:docMk/>
-            <pc:sldMk cId="0" sldId="280"/>
-            <ac:spMk id="9" creationId="{00000000-0000-0000-0000-000000000000}"/>
-          </ac:spMkLst>
-        </pc:spChg>
         <pc:spChg chg="mod">
           <ac:chgData name="Bushra Alharbi" userId="1ebed99a325c552f" providerId="LiveId" clId="{7E9390C9-CE98-4490-B8F4-5B736AED1368}" dt="2026-09-29T09:23:32.773" v="797" actId="122"/>
           <ac:spMkLst>
@@ -2829,14 +2264,6 @@
             <ac:spMk id="16" creationId="{00000000-0000-0000-0000-000000000000}"/>
           </ac:spMkLst>
         </pc:spChg>
-        <pc:picChg chg="del">
-          <ac:chgData name="Bushra Alharbi" userId="1ebed99a325c552f" providerId="LiveId" clId="{7E9390C9-CE98-4490-B8F4-5B736AED1368}" dt="2026-09-29T09:23:38.168" v="799" actId="478"/>
-          <ac:picMkLst>
-            <pc:docMk/>
-            <pc:sldMk cId="0" sldId="280"/>
-            <ac:picMk id="5" creationId="{00000000-0000-0000-0000-000000000000}"/>
-          </ac:picMkLst>
-        </pc:picChg>
         <pc:picChg chg="mod">
           <ac:chgData name="Bushra Alharbi" userId="1ebed99a325c552f" providerId="LiveId" clId="{7E9390C9-CE98-4490-B8F4-5B736AED1368}" dt="2026-09-29T10:03:44.577" v="1002" actId="1076"/>
           <ac:picMkLst>
@@ -2874,14 +2301,6 @@
             <pc:docMk/>
             <pc:sldMk cId="0" sldId="281"/>
             <ac:spMk id="4" creationId="{00000000-0000-0000-0000-000000000000}"/>
-          </ac:spMkLst>
-        </pc:spChg>
-        <pc:spChg chg="del mod">
-          <ac:chgData name="Bushra Alharbi" userId="1ebed99a325c552f" providerId="LiveId" clId="{7E9390C9-CE98-4490-B8F4-5B736AED1368}" dt="2026-09-29T09:35:26.655" v="803" actId="478"/>
-          <ac:spMkLst>
-            <pc:docMk/>
-            <pc:sldMk cId="0" sldId="281"/>
-            <ac:spMk id="9" creationId="{00000000-0000-0000-0000-000000000000}"/>
           </ac:spMkLst>
         </pc:spChg>
         <pc:spChg chg="mod">
@@ -2940,14 +2359,6 @@
             <ac:spMk id="16" creationId="{00000000-0000-0000-0000-000000000000}"/>
           </ac:spMkLst>
         </pc:spChg>
-        <pc:picChg chg="del">
-          <ac:chgData name="Bushra Alharbi" userId="1ebed99a325c552f" providerId="LiveId" clId="{7E9390C9-CE98-4490-B8F4-5B736AED1368}" dt="2026-09-29T09:35:28.841" v="804" actId="478"/>
-          <ac:picMkLst>
-            <pc:docMk/>
-            <pc:sldMk cId="0" sldId="281"/>
-            <ac:picMk id="5" creationId="{00000000-0000-0000-0000-000000000000}"/>
-          </ac:picMkLst>
-        </pc:picChg>
         <pc:picChg chg="mod">
           <ac:chgData name="Bushra Alharbi" userId="1ebed99a325c552f" providerId="LiveId" clId="{7E9390C9-CE98-4490-B8F4-5B736AED1368}" dt="2026-09-29T09:38:48.865" v="814" actId="1076"/>
           <ac:picMkLst>
@@ -3010,14 +2421,6 @@
             <ac:spMk id="3" creationId="{00000000-0000-0000-0000-000000000000}"/>
           </ac:spMkLst>
         </pc:spChg>
-        <pc:spChg chg="del mod">
-          <ac:chgData name="Bushra Alharbi" userId="1ebed99a325c552f" providerId="LiveId" clId="{7E9390C9-CE98-4490-B8F4-5B736AED1368}" dt="2026-09-29T10:34:26.143" v="1016" actId="478"/>
-          <ac:spMkLst>
-            <pc:docMk/>
-            <pc:sldMk cId="0" sldId="283"/>
-            <ac:spMk id="5" creationId="{00000000-0000-0000-0000-000000000000}"/>
-          </ac:spMkLst>
-        </pc:spChg>
         <pc:spChg chg="mod">
           <ac:chgData name="Bushra Alharbi" userId="1ebed99a325c552f" providerId="LiveId" clId="{7E9390C9-CE98-4490-B8F4-5B736AED1368}" dt="2026-09-29T10:38:31.703" v="1057" actId="2711"/>
           <ac:spMkLst>
@@ -3042,14 +2445,6 @@
             <ac:spMk id="8" creationId="{00000000-0000-0000-0000-000000000000}"/>
           </ac:spMkLst>
         </pc:spChg>
-        <pc:picChg chg="del">
-          <ac:chgData name="Bushra Alharbi" userId="1ebed99a325c552f" providerId="LiveId" clId="{7E9390C9-CE98-4490-B8F4-5B736AED1368}" dt="2026-09-29T10:34:29.566" v="1017" actId="478"/>
-          <ac:picMkLst>
-            <pc:docMk/>
-            <pc:sldMk cId="0" sldId="283"/>
-            <ac:picMk id="4" creationId="{00000000-0000-0000-0000-000000000000}"/>
-          </ac:picMkLst>
-        </pc:picChg>
       </pc:sldChg>
       <pc:sldChg chg="delSp modSp mod modTransition">
         <pc:chgData name="Bushra Alharbi" userId="1ebed99a325c552f" providerId="LiveId" clId="{7E9390C9-CE98-4490-B8F4-5B736AED1368}" dt="2026-09-29T12:17:19.674" v="1394"/>
@@ -3079,14 +2474,6 @@
             <pc:docMk/>
             <pc:sldMk cId="0" sldId="284"/>
             <ac:spMk id="4" creationId="{00000000-0000-0000-0000-000000000000}"/>
-          </ac:spMkLst>
-        </pc:spChg>
-        <pc:spChg chg="del">
-          <ac:chgData name="Bushra Alharbi" userId="1ebed99a325c552f" providerId="LiveId" clId="{7E9390C9-CE98-4490-B8F4-5B736AED1368}" dt="2026-09-29T10:39:15.664" v="1065" actId="478"/>
-          <ac:spMkLst>
-            <pc:docMk/>
-            <pc:sldMk cId="0" sldId="284"/>
-            <ac:spMk id="9" creationId="{00000000-0000-0000-0000-000000000000}"/>
           </ac:spMkLst>
         </pc:spChg>
         <pc:spChg chg="mod">
@@ -3145,14 +2532,6 @@
             <ac:spMk id="16" creationId="{00000000-0000-0000-0000-000000000000}"/>
           </ac:spMkLst>
         </pc:spChg>
-        <pc:picChg chg="del">
-          <ac:chgData name="Bushra Alharbi" userId="1ebed99a325c552f" providerId="LiveId" clId="{7E9390C9-CE98-4490-B8F4-5B736AED1368}" dt="2026-09-29T10:39:17.987" v="1066" actId="478"/>
-          <ac:picMkLst>
-            <pc:docMk/>
-            <pc:sldMk cId="0" sldId="284"/>
-            <ac:picMk id="5" creationId="{00000000-0000-0000-0000-000000000000}"/>
-          </ac:picMkLst>
-        </pc:picChg>
       </pc:sldChg>
       <pc:sldChg chg="delSp modSp mod modTransition">
         <pc:chgData name="Bushra Alharbi" userId="1ebed99a325c552f" providerId="LiveId" clId="{7E9390C9-CE98-4490-B8F4-5B736AED1368}" dt="2026-09-29T12:17:19.674" v="1394"/>
@@ -3190,14 +2569,6 @@
             <pc:docMk/>
             <pc:sldMk cId="0" sldId="285"/>
             <ac:spMk id="6" creationId="{00000000-0000-0000-0000-000000000000}"/>
-          </ac:spMkLst>
-        </pc:spChg>
-        <pc:spChg chg="del mod">
-          <ac:chgData name="Bushra Alharbi" userId="1ebed99a325c552f" providerId="LiveId" clId="{7E9390C9-CE98-4490-B8F4-5B736AED1368}" dt="2026-09-29T10:41:26.871" v="1077" actId="478"/>
-          <ac:spMkLst>
-            <pc:docMk/>
-            <pc:sldMk cId="0" sldId="285"/>
-            <ac:spMk id="11" creationId="{00000000-0000-0000-0000-000000000000}"/>
           </ac:spMkLst>
         </pc:spChg>
         <pc:spChg chg="mod">
@@ -3248,14 +2619,6 @@
             <ac:spMk id="23" creationId="{00000000-0000-0000-0000-000000000000}"/>
           </ac:spMkLst>
         </pc:spChg>
-        <pc:picChg chg="del">
-          <ac:chgData name="Bushra Alharbi" userId="1ebed99a325c552f" providerId="LiveId" clId="{7E9390C9-CE98-4490-B8F4-5B736AED1368}" dt="2026-09-29T10:41:22.382" v="1076" actId="478"/>
-          <ac:picMkLst>
-            <pc:docMk/>
-            <pc:sldMk cId="0" sldId="285"/>
-            <ac:picMk id="10" creationId="{00000000-0000-0000-0000-000000000000}"/>
-          </ac:picMkLst>
-        </pc:picChg>
       </pc:sldChg>
       <pc:sldChg chg="modSp mod modTransition">
         <pc:chgData name="Bushra Alharbi" userId="1ebed99a325c552f" providerId="LiveId" clId="{7E9390C9-CE98-4490-B8F4-5B736AED1368}" dt="2026-09-29T12:17:19.674" v="1394"/>
@@ -3390,14 +2753,6 @@
             <ac:spMk id="9" creationId="{00000000-0000-0000-0000-000000000000}"/>
           </ac:spMkLst>
         </pc:spChg>
-        <pc:spChg chg="del">
-          <ac:chgData name="Bushra Alharbi" userId="1ebed99a325c552f" providerId="LiveId" clId="{7E9390C9-CE98-4490-B8F4-5B736AED1368}" dt="2026-09-29T10:45:43.248" v="1122" actId="478"/>
-          <ac:spMkLst>
-            <pc:docMk/>
-            <pc:sldMk cId="0" sldId="287"/>
-            <ac:spMk id="11" creationId="{00000000-0000-0000-0000-000000000000}"/>
-          </ac:spMkLst>
-        </pc:spChg>
         <pc:spChg chg="mod">
           <ac:chgData name="Bushra Alharbi" userId="1ebed99a325c552f" providerId="LiveId" clId="{7E9390C9-CE98-4490-B8F4-5B736AED1368}" dt="2026-09-29T10:45:38.377" v="1121" actId="122"/>
           <ac:spMkLst>
@@ -3478,14 +2833,6 @@
             <ac:spMk id="24" creationId="{00000000-0000-0000-0000-000000000000}"/>
           </ac:spMkLst>
         </pc:spChg>
-        <pc:picChg chg="del">
-          <ac:chgData name="Bushra Alharbi" userId="1ebed99a325c552f" providerId="LiveId" clId="{7E9390C9-CE98-4490-B8F4-5B736AED1368}" dt="2026-09-29T10:45:45.438" v="1123" actId="478"/>
-          <ac:picMkLst>
-            <pc:docMk/>
-            <pc:sldMk cId="0" sldId="287"/>
-            <ac:picMk id="10" creationId="{00000000-0000-0000-0000-000000000000}"/>
-          </ac:picMkLst>
-        </pc:picChg>
       </pc:sldChg>
       <pc:sldChg chg="addSp delSp modSp mod modTransition">
         <pc:chgData name="Bushra Alharbi" userId="1ebed99a325c552f" providerId="LiveId" clId="{7E9390C9-CE98-4490-B8F4-5B736AED1368}" dt="2026-09-29T12:17:19.674" v="1394"/>
@@ -3515,14 +2862,6 @@
             <pc:docMk/>
             <pc:sldMk cId="0" sldId="288"/>
             <ac:spMk id="4" creationId="{00000000-0000-0000-0000-000000000000}"/>
-          </ac:spMkLst>
-        </pc:spChg>
-        <pc:spChg chg="del mod">
-          <ac:chgData name="Bushra Alharbi" userId="1ebed99a325c552f" providerId="LiveId" clId="{7E9390C9-CE98-4490-B8F4-5B736AED1368}" dt="2026-09-29T10:48:01.497" v="1162" actId="478"/>
-          <ac:spMkLst>
-            <pc:docMk/>
-            <pc:sldMk cId="0" sldId="288"/>
-            <ac:spMk id="9" creationId="{00000000-0000-0000-0000-000000000000}"/>
           </ac:spMkLst>
         </pc:spChg>
         <pc:spChg chg="mod">
@@ -3573,46 +2912,6 @@
             <ac:spMk id="16" creationId="{00000000-0000-0000-0000-000000000000}"/>
           </ac:spMkLst>
         </pc:spChg>
-        <pc:spChg chg="add del mod">
-          <ac:chgData name="Bushra Alharbi" userId="1ebed99a325c552f" providerId="LiveId" clId="{7E9390C9-CE98-4490-B8F4-5B736AED1368}" dt="2026-09-29T11:12:11.718" v="1172"/>
-          <ac:spMkLst>
-            <pc:docMk/>
-            <pc:sldMk cId="0" sldId="288"/>
-            <ac:spMk id="17" creationId="{7D823423-6053-6D1F-500F-F22C5A03CBDA}"/>
-          </ac:spMkLst>
-        </pc:spChg>
-        <pc:spChg chg="add del mod">
-          <ac:chgData name="Bushra Alharbi" userId="1ebed99a325c552f" providerId="LiveId" clId="{7E9390C9-CE98-4490-B8F4-5B736AED1368}" dt="2026-09-29T11:12:18.994" v="1176"/>
-          <ac:spMkLst>
-            <pc:docMk/>
-            <pc:sldMk cId="0" sldId="288"/>
-            <ac:spMk id="18" creationId="{9B800BD6-9752-278E-2F19-0D0A8D6A5C87}"/>
-          </ac:spMkLst>
-        </pc:spChg>
-        <pc:spChg chg="add del mod">
-          <ac:chgData name="Bushra Alharbi" userId="1ebed99a325c552f" providerId="LiveId" clId="{7E9390C9-CE98-4490-B8F4-5B736AED1368}" dt="2026-09-29T11:12:50.766" v="1180"/>
-          <ac:spMkLst>
-            <pc:docMk/>
-            <pc:sldMk cId="0" sldId="288"/>
-            <ac:spMk id="19" creationId="{95D18530-E64A-F3F2-43BC-1FC03AA9C983}"/>
-          </ac:spMkLst>
-        </pc:spChg>
-        <pc:spChg chg="add del mod">
-          <ac:chgData name="Bushra Alharbi" userId="1ebed99a325c552f" providerId="LiveId" clId="{7E9390C9-CE98-4490-B8F4-5B736AED1368}" dt="2026-09-29T11:24:46.498" v="1183" actId="478"/>
-          <ac:spMkLst>
-            <pc:docMk/>
-            <pc:sldMk cId="0" sldId="288"/>
-            <ac:spMk id="20" creationId="{5851791A-EE8A-0CC5-57F0-0F58E0A47504}"/>
-          </ac:spMkLst>
-        </pc:spChg>
-        <pc:picChg chg="del">
-          <ac:chgData name="Bushra Alharbi" userId="1ebed99a325c552f" providerId="LiveId" clId="{7E9390C9-CE98-4490-B8F4-5B736AED1368}" dt="2026-09-29T10:48:03.462" v="1163" actId="478"/>
-          <ac:picMkLst>
-            <pc:docMk/>
-            <pc:sldMk cId="0" sldId="288"/>
-            <ac:picMk id="5" creationId="{00000000-0000-0000-0000-000000000000}"/>
-          </ac:picMkLst>
-        </pc:picChg>
       </pc:sldChg>
       <pc:sldChg chg="delSp modSp mod modTransition">
         <pc:chgData name="Bushra Alharbi" userId="1ebed99a325c552f" providerId="LiveId" clId="{7E9390C9-CE98-4490-B8F4-5B736AED1368}" dt="2026-09-29T12:17:19.674" v="1394"/>
@@ -3642,14 +2941,6 @@
             <pc:docMk/>
             <pc:sldMk cId="0" sldId="289"/>
             <ac:spMk id="4" creationId="{00000000-0000-0000-0000-000000000000}"/>
-          </ac:spMkLst>
-        </pc:spChg>
-        <pc:spChg chg="del mod">
-          <ac:chgData name="Bushra Alharbi" userId="1ebed99a325c552f" providerId="LiveId" clId="{7E9390C9-CE98-4490-B8F4-5B736AED1368}" dt="2026-09-29T11:25:04.546" v="1185" actId="478"/>
-          <ac:spMkLst>
-            <pc:docMk/>
-            <pc:sldMk cId="0" sldId="289"/>
-            <ac:spMk id="6" creationId="{00000000-0000-0000-0000-000000000000}"/>
           </ac:spMkLst>
         </pc:spChg>
         <pc:spChg chg="mod">
@@ -3700,14 +2991,6 @@
             <ac:spMk id="13" creationId="{00000000-0000-0000-0000-000000000000}"/>
           </ac:spMkLst>
         </pc:spChg>
-        <pc:picChg chg="del">
-          <ac:chgData name="Bushra Alharbi" userId="1ebed99a325c552f" providerId="LiveId" clId="{7E9390C9-CE98-4490-B8F4-5B736AED1368}" dt="2026-09-29T11:25:07.353" v="1186" actId="478"/>
-          <ac:picMkLst>
-            <pc:docMk/>
-            <pc:sldMk cId="0" sldId="289"/>
-            <ac:picMk id="5" creationId="{00000000-0000-0000-0000-000000000000}"/>
-          </ac:picMkLst>
-        </pc:picChg>
       </pc:sldChg>
       <pc:sldChg chg="delSp modSp mod modTransition">
         <pc:chgData name="Bushra Alharbi" userId="1ebed99a325c552f" providerId="LiveId" clId="{7E9390C9-CE98-4490-B8F4-5B736AED1368}" dt="2026-09-29T12:17:19.674" v="1394"/>
@@ -3715,14 +2998,6 @@
           <pc:docMk/>
           <pc:sldMk cId="0" sldId="290"/>
         </pc:sldMkLst>
-        <pc:spChg chg="del mod">
-          <ac:chgData name="Bushra Alharbi" userId="1ebed99a325c552f" providerId="LiveId" clId="{7E9390C9-CE98-4490-B8F4-5B736AED1368}" dt="2026-09-29T11:25:59.258" v="1190" actId="478"/>
-          <ac:spMkLst>
-            <pc:docMk/>
-            <pc:sldMk cId="0" sldId="290"/>
-            <ac:spMk id="6" creationId="{00000000-0000-0000-0000-000000000000}"/>
-          </ac:spMkLst>
-        </pc:spChg>
         <pc:spChg chg="mod">
           <ac:chgData name="Bushra Alharbi" userId="1ebed99a325c552f" providerId="LiveId" clId="{7E9390C9-CE98-4490-B8F4-5B736AED1368}" dt="2026-09-29T11:25:44.104" v="1187" actId="122"/>
           <ac:spMkLst>
@@ -3755,14 +3030,6 @@
             <ac:spMk id="10" creationId="{00000000-0000-0000-0000-000000000000}"/>
           </ac:spMkLst>
         </pc:spChg>
-        <pc:picChg chg="del mod">
-          <ac:chgData name="Bushra Alharbi" userId="1ebed99a325c552f" providerId="LiveId" clId="{7E9390C9-CE98-4490-B8F4-5B736AED1368}" dt="2026-09-29T11:25:54.806" v="1189" actId="478"/>
-          <ac:picMkLst>
-            <pc:docMk/>
-            <pc:sldMk cId="0" sldId="290"/>
-            <ac:picMk id="2" creationId="{00000000-0000-0000-0000-000000000000}"/>
-          </ac:picMkLst>
-        </pc:picChg>
         <pc:picChg chg="mod">
           <ac:chgData name="Bushra Alharbi" userId="1ebed99a325c552f" providerId="LiveId" clId="{7E9390C9-CE98-4490-B8F4-5B736AED1368}" dt="2026-09-29T11:30:25.506" v="1218" actId="1076"/>
           <ac:picMkLst>
@@ -3823,14 +3090,6 @@
             <pc:docMk/>
             <pc:sldMk cId="0" sldId="292"/>
             <ac:spMk id="3" creationId="{00000000-0000-0000-0000-000000000000}"/>
-          </ac:spMkLst>
-        </pc:spChg>
-        <pc:spChg chg="del mod">
-          <ac:chgData name="Bushra Alharbi" userId="1ebed99a325c552f" providerId="LiveId" clId="{7E9390C9-CE98-4490-B8F4-5B736AED1368}" dt="2026-09-29T11:35:30.914" v="1229" actId="478"/>
-          <ac:spMkLst>
-            <pc:docMk/>
-            <pc:sldMk cId="0" sldId="292"/>
-            <ac:spMk id="7" creationId="{00000000-0000-0000-0000-000000000000}"/>
           </ac:spMkLst>
         </pc:spChg>
         <pc:spChg chg="mod">
@@ -3936,14 +3195,6 @@
             <ac:spMk id="4" creationId="{00000000-0000-0000-0000-000000000000}"/>
           </ac:spMkLst>
         </pc:spChg>
-        <pc:spChg chg="del mod">
-          <ac:chgData name="Bushra Alharbi" userId="1ebed99a325c552f" providerId="LiveId" clId="{7E9390C9-CE98-4490-B8F4-5B736AED1368}" dt="2026-09-29T11:38:37.573" v="1251" actId="478"/>
-          <ac:spMkLst>
-            <pc:docMk/>
-            <pc:sldMk cId="0" sldId="293"/>
-            <ac:spMk id="9" creationId="{00000000-0000-0000-0000-000000000000}"/>
-          </ac:spMkLst>
-        </pc:spChg>
         <pc:spChg chg="mod">
           <ac:chgData name="Bushra Alharbi" userId="1ebed99a325c552f" providerId="LiveId" clId="{7E9390C9-CE98-4490-B8F4-5B736AED1368}" dt="2026-09-29T11:38:33.287" v="1250" actId="122"/>
           <ac:spMkLst>
@@ -4031,14 +3282,6 @@
             <ac:spMk id="3" creationId="{00000000-0000-0000-0000-000000000000}"/>
           </ac:spMkLst>
         </pc:spChg>
-        <pc:spChg chg="del mod">
-          <ac:chgData name="Bushra Alharbi" userId="1ebed99a325c552f" providerId="LiveId" clId="{7E9390C9-CE98-4490-B8F4-5B736AED1368}" dt="2026-09-29T11:40:39.770" v="1269" actId="478"/>
-          <ac:spMkLst>
-            <pc:docMk/>
-            <pc:sldMk cId="0" sldId="294"/>
-            <ac:spMk id="5" creationId="{00000000-0000-0000-0000-000000000000}"/>
-          </ac:spMkLst>
-        </pc:spChg>
         <pc:spChg chg="mod">
           <ac:chgData name="Bushra Alharbi" userId="1ebed99a325c552f" providerId="LiveId" clId="{7E9390C9-CE98-4490-B8F4-5B736AED1368}" dt="2026-09-29T11:41:19.442" v="1273" actId="20577"/>
           <ac:spMkLst>
@@ -4063,14 +3306,6 @@
             <ac:spMk id="8" creationId="{00000000-0000-0000-0000-000000000000}"/>
           </ac:spMkLst>
         </pc:spChg>
-        <pc:picChg chg="del">
-          <ac:chgData name="Bushra Alharbi" userId="1ebed99a325c552f" providerId="LiveId" clId="{7E9390C9-CE98-4490-B8F4-5B736AED1368}" dt="2026-09-29T11:40:43.652" v="1270" actId="478"/>
-          <ac:picMkLst>
-            <pc:docMk/>
-            <pc:sldMk cId="0" sldId="294"/>
-            <ac:picMk id="4" creationId="{00000000-0000-0000-0000-000000000000}"/>
-          </ac:picMkLst>
-        </pc:picChg>
       </pc:sldChg>
       <pc:sldChg chg="addSp delSp modSp mod modTransition">
         <pc:chgData name="Bushra Alharbi" userId="1ebed99a325c552f" providerId="LiveId" clId="{7E9390C9-CE98-4490-B8F4-5B736AED1368}" dt="2026-09-29T12:17:19.674" v="1394"/>
@@ -4092,14 +3327,6 @@
             <pc:docMk/>
             <pc:sldMk cId="0" sldId="295"/>
             <ac:spMk id="4" creationId="{00000000-0000-0000-0000-000000000000}"/>
-          </ac:spMkLst>
-        </pc:spChg>
-        <pc:spChg chg="del mod">
-          <ac:chgData name="Bushra Alharbi" userId="1ebed99a325c552f" providerId="LiveId" clId="{7E9390C9-CE98-4490-B8F4-5B736AED1368}" dt="2026-09-29T11:41:44.420" v="1275" actId="478"/>
-          <ac:spMkLst>
-            <pc:docMk/>
-            <pc:sldMk cId="0" sldId="295"/>
-            <ac:spMk id="9" creationId="{00000000-0000-0000-0000-000000000000}"/>
           </ac:spMkLst>
         </pc:spChg>
         <pc:spChg chg="mod">
@@ -4181,14 +3408,6 @@
           <pc:docMk/>
           <pc:sldMk cId="0" sldId="296"/>
         </pc:sldMkLst>
-        <pc:spChg chg="del mod">
-          <ac:chgData name="Bushra Alharbi" userId="1ebed99a325c552f" providerId="LiveId" clId="{7E9390C9-CE98-4490-B8F4-5B736AED1368}" dt="2026-09-29T11:47:57.226" v="1293" actId="478"/>
-          <ac:spMkLst>
-            <pc:docMk/>
-            <pc:sldMk cId="0" sldId="296"/>
-            <ac:spMk id="6" creationId="{00000000-0000-0000-0000-000000000000}"/>
-          </ac:spMkLst>
-        </pc:spChg>
         <pc:spChg chg="mod">
           <ac:chgData name="Bushra Alharbi" userId="1ebed99a325c552f" providerId="LiveId" clId="{7E9390C9-CE98-4490-B8F4-5B736AED1368}" dt="2026-09-29T11:47:47.326" v="1291" actId="1076"/>
           <ac:spMkLst>
@@ -4292,14 +3511,6 @@
             <ac:spMk id="4" creationId="{00000000-0000-0000-0000-000000000000}"/>
           </ac:spMkLst>
         </pc:spChg>
-        <pc:spChg chg="del mod">
-          <ac:chgData name="Bushra Alharbi" userId="1ebed99a325c552f" providerId="LiveId" clId="{7E9390C9-CE98-4490-B8F4-5B736AED1368}" dt="2026-09-29T11:52:48.975" v="1319" actId="478"/>
-          <ac:spMkLst>
-            <pc:docMk/>
-            <pc:sldMk cId="0" sldId="297"/>
-            <ac:spMk id="9" creationId="{00000000-0000-0000-0000-000000000000}"/>
-          </ac:spMkLst>
-        </pc:spChg>
         <pc:spChg chg="mod">
           <ac:chgData name="Bushra Alharbi" userId="1ebed99a325c552f" providerId="LiveId" clId="{7E9390C9-CE98-4490-B8F4-5B736AED1368}" dt="2026-09-29T11:52:45.755" v="1318" actId="122"/>
           <ac:spMkLst>
@@ -4379,14 +3590,6 @@
             <ac:spMk id="3" creationId="{00000000-0000-0000-0000-000000000000}"/>
           </ac:spMkLst>
         </pc:spChg>
-        <pc:spChg chg="del mod">
-          <ac:chgData name="Bushra Alharbi" userId="1ebed99a325c552f" providerId="LiveId" clId="{7E9390C9-CE98-4490-B8F4-5B736AED1368}" dt="2026-09-29T11:53:51.277" v="1327" actId="478"/>
-          <ac:spMkLst>
-            <pc:docMk/>
-            <pc:sldMk cId="0" sldId="298"/>
-            <ac:spMk id="9" creationId="{00000000-0000-0000-0000-000000000000}"/>
-          </ac:spMkLst>
-        </pc:spChg>
         <pc:spChg chg="mod">
           <ac:chgData name="Bushra Alharbi" userId="1ebed99a325c552f" providerId="LiveId" clId="{7E9390C9-CE98-4490-B8F4-5B736AED1368}" dt="2026-09-29T11:59:22.184" v="1347" actId="20577"/>
           <ac:spMkLst>
@@ -4451,14 +3654,6 @@
             <ac:spMk id="22" creationId="{00000000-0000-0000-0000-000000000000}"/>
           </ac:spMkLst>
         </pc:spChg>
-        <pc:picChg chg="del">
-          <ac:chgData name="Bushra Alharbi" userId="1ebed99a325c552f" providerId="LiveId" clId="{7E9390C9-CE98-4490-B8F4-5B736AED1368}" dt="2026-09-29T11:53:53.529" v="1328" actId="478"/>
-          <ac:picMkLst>
-            <pc:docMk/>
-            <pc:sldMk cId="0" sldId="298"/>
-            <ac:picMk id="5" creationId="{00000000-0000-0000-0000-000000000000}"/>
-          </ac:picMkLst>
-        </pc:picChg>
       </pc:sldChg>
       <pc:sldChg chg="delSp modSp mod modTransition">
         <pc:chgData name="Bushra Alharbi" userId="1ebed99a325c552f" providerId="LiveId" clId="{7E9390C9-CE98-4490-B8F4-5B736AED1368}" dt="2026-09-29T12:17:19.674" v="1394"/>
@@ -4488,14 +3683,6 @@
             <pc:docMk/>
             <pc:sldMk cId="0" sldId="299"/>
             <ac:spMk id="4" creationId="{00000000-0000-0000-0000-000000000000}"/>
-          </ac:spMkLst>
-        </pc:spChg>
-        <pc:spChg chg="del">
-          <ac:chgData name="Bushra Alharbi" userId="1ebed99a325c552f" providerId="LiveId" clId="{7E9390C9-CE98-4490-B8F4-5B736AED1368}" dt="2026-09-29T12:00:20.339" v="1349" actId="478"/>
-          <ac:spMkLst>
-            <pc:docMk/>
-            <pc:sldMk cId="0" sldId="299"/>
-            <ac:spMk id="9" creationId="{00000000-0000-0000-0000-000000000000}"/>
           </ac:spMkLst>
         </pc:spChg>
         <pc:spChg chg="mod">
@@ -4554,14 +3741,6 @@
             <ac:spMk id="16" creationId="{00000000-0000-0000-0000-000000000000}"/>
           </ac:spMkLst>
         </pc:spChg>
-        <pc:picChg chg="del">
-          <ac:chgData name="Bushra Alharbi" userId="1ebed99a325c552f" providerId="LiveId" clId="{7E9390C9-CE98-4490-B8F4-5B736AED1368}" dt="2026-09-29T12:00:23.339" v="1350" actId="478"/>
-          <ac:picMkLst>
-            <pc:docMk/>
-            <pc:sldMk cId="0" sldId="299"/>
-            <ac:picMk id="5" creationId="{00000000-0000-0000-0000-000000000000}"/>
-          </ac:picMkLst>
-        </pc:picChg>
       </pc:sldChg>
       <pc:sldChg chg="modTransition">
         <pc:chgData name="Bushra Alharbi" userId="1ebed99a325c552f" providerId="LiveId" clId="{7E9390C9-CE98-4490-B8F4-5B736AED1368}" dt="2026-09-29T12:17:19.674" v="1394"/>
@@ -4591,14 +3770,6 @@
             <ac:spMk id="2" creationId="{00000000-0000-0000-0000-000000000000}"/>
           </ac:spMkLst>
         </pc:spChg>
-        <pc:spChg chg="del mod">
-          <ac:chgData name="Bushra Alharbi" userId="1ebed99a325c552f" providerId="LiveId" clId="{7E9390C9-CE98-4490-B8F4-5B736AED1368}" dt="2026-09-29T12:05:16.074" v="1366" actId="478"/>
-          <ac:spMkLst>
-            <pc:docMk/>
-            <pc:sldMk cId="0" sldId="302"/>
-            <ac:spMk id="4" creationId="{00000000-0000-0000-0000-000000000000}"/>
-          </ac:spMkLst>
-        </pc:spChg>
         <pc:spChg chg="mod">
           <ac:chgData name="Bushra Alharbi" userId="1ebed99a325c552f" providerId="LiveId" clId="{7E9390C9-CE98-4490-B8F4-5B736AED1368}" dt="2026-09-29T12:05:13.041" v="1365" actId="122"/>
           <ac:spMkLst>
@@ -4615,14 +3786,6 @@
             <ac:spMk id="6" creationId="{00000000-0000-0000-0000-000000000000}"/>
           </ac:spMkLst>
         </pc:spChg>
-        <pc:picChg chg="del">
-          <ac:chgData name="Bushra Alharbi" userId="1ebed99a325c552f" providerId="LiveId" clId="{7E9390C9-CE98-4490-B8F4-5B736AED1368}" dt="2026-09-29T12:05:19.126" v="1367" actId="478"/>
-          <ac:picMkLst>
-            <pc:docMk/>
-            <pc:sldMk cId="0" sldId="302"/>
-            <ac:picMk id="3" creationId="{00000000-0000-0000-0000-000000000000}"/>
-          </ac:picMkLst>
-        </pc:picChg>
       </pc:sldChg>
       <pc:sldChg chg="delSp modSp mod modTransition">
         <pc:chgData name="Bushra Alharbi" userId="1ebed99a325c552f" providerId="LiveId" clId="{7E9390C9-CE98-4490-B8F4-5B736AED1368}" dt="2026-09-29T12:17:19.674" v="1394"/>
@@ -4644,14 +3807,6 @@
             <pc:docMk/>
             <pc:sldMk cId="0" sldId="303"/>
             <ac:spMk id="4" creationId="{00000000-0000-0000-0000-000000000000}"/>
-          </ac:spMkLst>
-        </pc:spChg>
-        <pc:spChg chg="del mod">
-          <ac:chgData name="Bushra Alharbi" userId="1ebed99a325c552f" providerId="LiveId" clId="{7E9390C9-CE98-4490-B8F4-5B736AED1368}" dt="2026-09-29T12:06:44.282" v="1373" actId="478"/>
-          <ac:spMkLst>
-            <pc:docMk/>
-            <pc:sldMk cId="0" sldId="303"/>
-            <ac:spMk id="9" creationId="{00000000-0000-0000-0000-000000000000}"/>
           </ac:spMkLst>
         </pc:spChg>
         <pc:spChg chg="mod">
@@ -4710,14 +3865,6 @@
             <ac:spMk id="16" creationId="{00000000-0000-0000-0000-000000000000}"/>
           </ac:spMkLst>
         </pc:spChg>
-        <pc:picChg chg="del">
-          <ac:chgData name="Bushra Alharbi" userId="1ebed99a325c552f" providerId="LiveId" clId="{7E9390C9-CE98-4490-B8F4-5B736AED1368}" dt="2026-09-29T12:06:46.792" v="1374" actId="478"/>
-          <ac:picMkLst>
-            <pc:docMk/>
-            <pc:sldMk cId="0" sldId="303"/>
-            <ac:picMk id="5" creationId="{00000000-0000-0000-0000-000000000000}"/>
-          </ac:picMkLst>
-        </pc:picChg>
       </pc:sldChg>
       <pc:sldChg chg="addSp delSp modSp mod modTransition">
         <pc:chgData name="Bushra Alharbi" userId="1ebed99a325c552f" providerId="LiveId" clId="{7E9390C9-CE98-4490-B8F4-5B736AED1368}" dt="2026-09-29T12:17:19.674" v="1394"/>
@@ -4725,14 +3872,6 @@
           <pc:docMk/>
           <pc:sldMk cId="0" sldId="304"/>
         </pc:sldMkLst>
-        <pc:spChg chg="del mod">
-          <ac:chgData name="Bushra Alharbi" userId="1ebed99a325c552f" providerId="LiveId" clId="{7E9390C9-CE98-4490-B8F4-5B736AED1368}" dt="2026-09-29T12:08:09.619" v="1386" actId="478"/>
-          <ac:spMkLst>
-            <pc:docMk/>
-            <pc:sldMk cId="0" sldId="304"/>
-            <ac:spMk id="6" creationId="{00000000-0000-0000-0000-000000000000}"/>
-          </ac:spMkLst>
-        </pc:spChg>
         <pc:spChg chg="mod">
           <ac:chgData name="Bushra Alharbi" userId="1ebed99a325c552f" providerId="LiveId" clId="{7E9390C9-CE98-4490-B8F4-5B736AED1368}" dt="2026-09-29T12:07:02.310" v="1376" actId="122"/>
           <ac:spMkLst>
@@ -5217,7 +4356,7 @@
           <a:p>
             <a:fld id="{A7624C2C-5C60-4A46-A005-8762C8BDA637}" type="datetimeFigureOut">
               <a:rPr lang="ar-SA" smtClean="0"/>
-              <a:t>17/04/48</a:t>
+              <a:t>16/05/48</a:t>
             </a:fld>
             <a:endParaRPr lang="ar-SA"/>
           </a:p>
@@ -5394,7 +4533,7 @@
           <a:p>
             <a:fld id="{214E4C62-C4D0-44C2-BDD8-93EA5DCAF9D9}" type="datetimeFigureOut">
               <a:rPr lang="ar-SA" smtClean="0"/>
-              <a:t>17/04/48</a:t>
+              <a:t>16/05/48</a:t>
             </a:fld>
             <a:endParaRPr lang="ar-SA"/>
           </a:p>
@@ -6015,7 +5154,7 @@
           <a:p>
             <a:fld id="{5BCAD085-E8A6-8845-BD4E-CB4CCA059FC4}" type="datetimeFigureOut">
               <a:rPr lang="en-US" smtClean="0"/>
-              <a:t>9/29/2026</a:t>
+              <a:t>10/27/2026</a:t>
             </a:fld>
             <a:endParaRPr lang="en-US"/>
           </a:p>
@@ -6073,13 +5212,13 @@
   <p:clrMapOvr>
     <a:masterClrMapping/>
   </p:clrMapOvr>
-  <mc:AlternateContent xmlns:mc="http://schemas.openxmlformats.org/markup-compatibility/2006">
-    <mc:Choice xmlns:p15="http://schemas.microsoft.com/office/powerpoint/2012/main" Requires="p15">
+  <mc:AlternateContent xmlns:mc="http://schemas.openxmlformats.org/markup-compatibility/2006" xmlns:p15="http://schemas.microsoft.com/office/powerpoint/2012/main">
+    <mc:Choice Requires="p15">
       <p:transition xmlns:p14="http://schemas.microsoft.com/office/powerpoint/2010/main" spd="slow" p14:dur="1250">
         <p15:prstTrans prst="peelOff"/>
       </p:transition>
     </mc:Choice>
-    <mc:Fallback>
+    <mc:Fallback xmlns="">
       <p:transition spd="slow">
         <p:fade/>
       </p:transition>
@@ -6221,7 +5360,7 @@
           <a:p>
             <a:fld id="{5BCAD085-E8A6-8845-BD4E-CB4CCA059FC4}" type="datetimeFigureOut">
               <a:rPr lang="en-US" smtClean="0"/>
-              <a:t>9/29/2026</a:t>
+              <a:t>10/27/2026</a:t>
             </a:fld>
             <a:endParaRPr lang="en-US"/>
           </a:p>
@@ -6279,13 +5418,13 @@
   <p:clrMapOvr>
     <a:masterClrMapping/>
   </p:clrMapOvr>
-  <mc:AlternateContent xmlns:mc="http://schemas.openxmlformats.org/markup-compatibility/2006">
-    <mc:Choice xmlns:p15="http://schemas.microsoft.com/office/powerpoint/2012/main" Requires="p15">
+  <mc:AlternateContent xmlns:mc="http://schemas.openxmlformats.org/markup-compatibility/2006" xmlns:p15="http://schemas.microsoft.com/office/powerpoint/2012/main">
+    <mc:Choice Requires="p15">
       <p:transition xmlns:p14="http://schemas.microsoft.com/office/powerpoint/2010/main" spd="slow" p14:dur="1250">
         <p15:prstTrans prst="peelOff"/>
       </p:transition>
     </mc:Choice>
-    <mc:Fallback>
+    <mc:Fallback xmlns="">
       <p:transition spd="slow">
         <p:fade/>
       </p:transition>
@@ -6417,7 +5556,7 @@
           <a:p>
             <a:fld id="{5BCAD085-E8A6-8845-BD4E-CB4CCA059FC4}" type="datetimeFigureOut">
               <a:rPr lang="en-US" smtClean="0"/>
-              <a:t>9/29/2026</a:t>
+              <a:t>10/27/2026</a:t>
             </a:fld>
             <a:endParaRPr lang="en-US"/>
           </a:p>
@@ -6475,13 +5614,13 @@
   <p:clrMapOvr>
     <a:masterClrMapping/>
   </p:clrMapOvr>
-  <mc:AlternateContent xmlns:mc="http://schemas.openxmlformats.org/markup-compatibility/2006">
-    <mc:Choice xmlns:p15="http://schemas.microsoft.com/office/powerpoint/2012/main" Requires="p15">
+  <mc:AlternateContent xmlns:mc="http://schemas.openxmlformats.org/markup-compatibility/2006" xmlns:p15="http://schemas.microsoft.com/office/powerpoint/2012/main">
+    <mc:Choice Requires="p15">
       <p:transition xmlns:p14="http://schemas.microsoft.com/office/powerpoint/2010/main" spd="slow" p14:dur="1250">
         <p15:prstTrans prst="peelOff"/>
       </p:transition>
     </mc:Choice>
-    <mc:Fallback>
+    <mc:Fallback xmlns="">
       <p:transition spd="slow">
         <p:fade/>
       </p:transition>
@@ -6597,7 +5736,7 @@
           <a:p>
             <a:fld id="{5BCAD085-E8A6-8845-BD4E-CB4CCA059FC4}" type="datetimeFigureOut">
               <a:rPr lang="en-US" smtClean="0"/>
-              <a:t>9/29/2026</a:t>
+              <a:t>10/27/2026</a:t>
             </a:fld>
             <a:endParaRPr lang="en-US"/>
           </a:p>
@@ -6655,13 +5794,13 @@
   <p:clrMapOvr>
     <a:masterClrMapping/>
   </p:clrMapOvr>
-  <mc:AlternateContent xmlns:mc="http://schemas.openxmlformats.org/markup-compatibility/2006">
-    <mc:Choice xmlns:p15="http://schemas.microsoft.com/office/powerpoint/2012/main" Requires="p15">
+  <mc:AlternateContent xmlns:mc="http://schemas.openxmlformats.org/markup-compatibility/2006" xmlns:p15="http://schemas.microsoft.com/office/powerpoint/2012/main">
+    <mc:Choice Requires="p15">
       <p:transition xmlns:p14="http://schemas.microsoft.com/office/powerpoint/2010/main" spd="slow" p14:dur="1250">
         <p15:prstTrans prst="peelOff"/>
       </p:transition>
     </mc:Choice>
-    <mc:Fallback>
+    <mc:Fallback xmlns="">
       <p:transition spd="slow">
         <p:fade/>
       </p:transition>
@@ -6854,7 +5993,7 @@
           <a:p>
             <a:fld id="{5BCAD085-E8A6-8845-BD4E-CB4CCA059FC4}" type="datetimeFigureOut">
               <a:rPr lang="en-US" smtClean="0"/>
-              <a:t>9/29/2026</a:t>
+              <a:t>10/27/2026</a:t>
             </a:fld>
             <a:endParaRPr lang="en-US"/>
           </a:p>
@@ -6912,13 +6051,13 @@
   <p:clrMapOvr>
     <a:masterClrMapping/>
   </p:clrMapOvr>
-  <mc:AlternateContent xmlns:mc="http://schemas.openxmlformats.org/markup-compatibility/2006">
-    <mc:Choice xmlns:p15="http://schemas.microsoft.com/office/powerpoint/2012/main" Requires="p15">
+  <mc:AlternateContent xmlns:mc="http://schemas.openxmlformats.org/markup-compatibility/2006" xmlns:p15="http://schemas.microsoft.com/office/powerpoint/2012/main">
+    <mc:Choice Requires="p15">
       <p:transition xmlns:p14="http://schemas.microsoft.com/office/powerpoint/2010/main" spd="slow" p14:dur="1250">
         <p15:prstTrans prst="peelOff"/>
       </p:transition>
     </mc:Choice>
-    <mc:Fallback>
+    <mc:Fallback xmlns="">
       <p:transition spd="slow">
         <p:fade/>
       </p:transition>
@@ -7151,7 +6290,7 @@
           <a:p>
             <a:fld id="{5BCAD085-E8A6-8845-BD4E-CB4CCA059FC4}" type="datetimeFigureOut">
               <a:rPr lang="en-US" smtClean="0"/>
-              <a:t>9/29/2026</a:t>
+              <a:t>10/27/2026</a:t>
             </a:fld>
             <a:endParaRPr lang="en-US"/>
           </a:p>
@@ -7209,13 +6348,13 @@
   <p:clrMapOvr>
     <a:masterClrMapping/>
   </p:clrMapOvr>
-  <mc:AlternateContent xmlns:mc="http://schemas.openxmlformats.org/markup-compatibility/2006">
-    <mc:Choice xmlns:p15="http://schemas.microsoft.com/office/powerpoint/2012/main" Requires="p15">
+  <mc:AlternateContent xmlns:mc="http://schemas.openxmlformats.org/markup-compatibility/2006" xmlns:p15="http://schemas.microsoft.com/office/powerpoint/2012/main">
+    <mc:Choice Requires="p15">
       <p:transition xmlns:p14="http://schemas.microsoft.com/office/powerpoint/2010/main" spd="slow" p14:dur="1250">
         <p15:prstTrans prst="peelOff"/>
       </p:transition>
     </mc:Choice>
-    <mc:Fallback>
+    <mc:Fallback xmlns="">
       <p:transition spd="slow">
         <p:fade/>
       </p:transition>
@@ -7582,7 +6721,7 @@
           <a:p>
             <a:fld id="{5BCAD085-E8A6-8845-BD4E-CB4CCA059FC4}" type="datetimeFigureOut">
               <a:rPr lang="en-US" smtClean="0"/>
-              <a:t>9/29/2026</a:t>
+              <a:t>10/27/2026</a:t>
             </a:fld>
             <a:endParaRPr lang="en-US"/>
           </a:p>
@@ -7640,13 +6779,13 @@
   <p:clrMapOvr>
     <a:masterClrMapping/>
   </p:clrMapOvr>
-  <mc:AlternateContent xmlns:mc="http://schemas.openxmlformats.org/markup-compatibility/2006">
-    <mc:Choice xmlns:p15="http://schemas.microsoft.com/office/powerpoint/2012/main" Requires="p15">
+  <mc:AlternateContent xmlns:mc="http://schemas.openxmlformats.org/markup-compatibility/2006" xmlns:p15="http://schemas.microsoft.com/office/powerpoint/2012/main">
+    <mc:Choice Requires="p15">
       <p:transition xmlns:p14="http://schemas.microsoft.com/office/powerpoint/2010/main" spd="slow" p14:dur="1250">
         <p15:prstTrans prst="peelOff"/>
       </p:transition>
     </mc:Choice>
-    <mc:Fallback>
+    <mc:Fallback xmlns="">
       <p:transition spd="slow">
         <p:fade/>
       </p:transition>
@@ -7711,7 +6850,7 @@
           <a:p>
             <a:fld id="{5BCAD085-E8A6-8845-BD4E-CB4CCA059FC4}" type="datetimeFigureOut">
               <a:rPr lang="en-US" smtClean="0"/>
-              <a:t>9/29/2026</a:t>
+              <a:t>10/27/2026</a:t>
             </a:fld>
             <a:endParaRPr lang="en-US"/>
           </a:p>
@@ -7769,13 +6908,13 @@
   <p:clrMapOvr>
     <a:masterClrMapping/>
   </p:clrMapOvr>
-  <mc:AlternateContent xmlns:mc="http://schemas.openxmlformats.org/markup-compatibility/2006">
-    <mc:Choice xmlns:p15="http://schemas.microsoft.com/office/powerpoint/2012/main" Requires="p15">
+  <mc:AlternateContent xmlns:mc="http://schemas.openxmlformats.org/markup-compatibility/2006" xmlns:p15="http://schemas.microsoft.com/office/powerpoint/2012/main">
+    <mc:Choice Requires="p15">
       <p:transition xmlns:p14="http://schemas.microsoft.com/office/powerpoint/2010/main" spd="slow" p14:dur="1250">
         <p15:prstTrans prst="peelOff"/>
       </p:transition>
     </mc:Choice>
-    <mc:Fallback>
+    <mc:Fallback xmlns="">
       <p:transition spd="slow">
         <p:fade/>
       </p:transition>
@@ -7825,7 +6964,7 @@
             <a:fld id="{5BCAD085-E8A6-8845-BD4E-CB4CCA059FC4}" type="datetimeFigureOut">
               <a:rPr lang="en-US" smtClean="0"/>
               <a:pPr/>
-              <a:t>9/29/2026</a:t>
+              <a:t>10/27/2026</a:t>
             </a:fld>
             <a:endParaRPr lang="en-US" dirty="0"/>
           </a:p>
@@ -7896,13 +7035,13 @@
   <p:clrMapOvr>
     <a:masterClrMapping/>
   </p:clrMapOvr>
-  <mc:AlternateContent xmlns:mc="http://schemas.openxmlformats.org/markup-compatibility/2006">
-    <mc:Choice xmlns:p15="http://schemas.microsoft.com/office/powerpoint/2012/main" Requires="p15">
+  <mc:AlternateContent xmlns:mc="http://schemas.openxmlformats.org/markup-compatibility/2006" xmlns:p15="http://schemas.microsoft.com/office/powerpoint/2012/main">
+    <mc:Choice Requires="p15">
       <p:transition xmlns:p14="http://schemas.microsoft.com/office/powerpoint/2010/main" spd="slow" p14:dur="1250">
         <p15:prstTrans prst="peelOff"/>
       </p:transition>
     </mc:Choice>
-    <mc:Fallback>
+    <mc:Fallback xmlns="">
       <p:transition spd="slow">
         <p:fade/>
       </p:transition>
@@ -8146,7 +7285,7 @@
             <a:fld id="{5BCAD085-E8A6-8845-BD4E-CB4CCA059FC4}" type="datetimeFigureOut">
               <a:rPr lang="en-US" smtClean="0"/>
               <a:pPr/>
-              <a:t>9/29/2026</a:t>
+              <a:t>10/27/2026</a:t>
             </a:fld>
             <a:endParaRPr lang="en-US"/>
           </a:p>
@@ -8217,13 +7356,13 @@
   <p:clrMapOvr>
     <a:masterClrMapping/>
   </p:clrMapOvr>
-  <mc:AlternateContent xmlns:mc="http://schemas.openxmlformats.org/markup-compatibility/2006">
-    <mc:Choice xmlns:p15="http://schemas.microsoft.com/office/powerpoint/2012/main" Requires="p15">
+  <mc:AlternateContent xmlns:mc="http://schemas.openxmlformats.org/markup-compatibility/2006" xmlns:p15="http://schemas.microsoft.com/office/powerpoint/2012/main">
+    <mc:Choice Requires="p15">
       <p:transition xmlns:p14="http://schemas.microsoft.com/office/powerpoint/2010/main" spd="slow" p14:dur="1250">
         <p15:prstTrans prst="peelOff"/>
       </p:transition>
     </mc:Choice>
-    <mc:Fallback>
+    <mc:Fallback xmlns="">
       <p:transition spd="slow">
         <p:fade/>
       </p:transition>
@@ -8436,7 +7575,7 @@
             <a:fld id="{5BCAD085-E8A6-8845-BD4E-CB4CCA059FC4}" type="datetimeFigureOut">
               <a:rPr lang="en-US" smtClean="0"/>
               <a:pPr/>
-              <a:t>9/29/2026</a:t>
+              <a:t>10/27/2026</a:t>
             </a:fld>
             <a:endParaRPr lang="en-US"/>
           </a:p>
@@ -8507,13 +7646,13 @@
   <p:clrMapOvr>
     <a:masterClrMapping/>
   </p:clrMapOvr>
-  <mc:AlternateContent xmlns:mc="http://schemas.openxmlformats.org/markup-compatibility/2006">
-    <mc:Choice xmlns:p15="http://schemas.microsoft.com/office/powerpoint/2012/main" Requires="p15">
+  <mc:AlternateContent xmlns:mc="http://schemas.openxmlformats.org/markup-compatibility/2006" xmlns:p15="http://schemas.microsoft.com/office/powerpoint/2012/main">
+    <mc:Choice Requires="p15">
       <p:transition xmlns:p14="http://schemas.microsoft.com/office/powerpoint/2010/main" spd="slow" p14:dur="1250">
         <p15:prstTrans prst="peelOff"/>
       </p:transition>
     </mc:Choice>
-    <mc:Fallback>
+    <mc:Fallback xmlns="">
       <p:transition spd="slow">
         <p:fade/>
       </p:transition>
@@ -8675,7 +7814,7 @@
             <a:fld id="{5BCAD085-E8A6-8845-BD4E-CB4CCA059FC4}" type="datetimeFigureOut">
               <a:rPr lang="en-US" smtClean="0"/>
               <a:pPr/>
-              <a:t>9/29/2026</a:t>
+              <a:t>10/27/2026</a:t>
             </a:fld>
             <a:endParaRPr lang="en-US"/>
           </a:p>
@@ -8817,13 +7956,13 @@
     <p:sldLayoutId id="2147483658" r:id="rId10"/>
     <p:sldLayoutId id="2147483659" r:id="rId11"/>
   </p:sldLayoutIdLst>
-  <mc:AlternateContent xmlns:mc="http://schemas.openxmlformats.org/markup-compatibility/2006">
-    <mc:Choice xmlns:p15="http://schemas.microsoft.com/office/powerpoint/2012/main" Requires="p15">
+  <mc:AlternateContent xmlns:mc="http://schemas.openxmlformats.org/markup-compatibility/2006" xmlns:p15="http://schemas.microsoft.com/office/powerpoint/2012/main">
+    <mc:Choice Requires="p15">
       <p:transition xmlns:p14="http://schemas.microsoft.com/office/powerpoint/2010/main" spd="slow" p14:dur="1250">
         <p15:prstTrans prst="peelOff"/>
       </p:transition>
     </mc:Choice>
-    <mc:Fallback>
+    <mc:Fallback xmlns="">
       <p:transition spd="slow">
         <p:fade/>
       </p:transition>
@@ -9549,8 +8688,8 @@
         </p:nvSpPr>
         <p:spPr>
           <a:xfrm>
-            <a:off x="4355689" y="6081993"/>
-            <a:ext cx="2910348" cy="707886"/>
+            <a:off x="4204434" y="6081993"/>
+            <a:ext cx="3470785" cy="707886"/>
           </a:xfrm>
           <a:prstGeom prst="rect">
             <a:avLst/>
@@ -9570,7 +8709,7 @@
                   <a:schemeClr val="bg1"/>
                 </a:solidFill>
               </a:rPr>
-              <a:t>بإشراف الدكتورة: آلاء نواز</a:t>
+              <a:t>بإشراف الدكتورة: آلاء عبدالهادي نواز</a:t>
             </a:r>
           </a:p>
           <a:p>
@@ -9644,13 +8783,13 @@
   <p:clrMapOvr>
     <a:masterClrMapping/>
   </p:clrMapOvr>
-  <mc:AlternateContent xmlns:mc="http://schemas.openxmlformats.org/markup-compatibility/2006">
-    <mc:Choice xmlns:p15="http://schemas.microsoft.com/office/powerpoint/2012/main" Requires="p15">
+  <mc:AlternateContent xmlns:mc="http://schemas.openxmlformats.org/markup-compatibility/2006" xmlns:p15="http://schemas.microsoft.com/office/powerpoint/2012/main">
+    <mc:Choice Requires="p15">
       <p:transition xmlns:p14="http://schemas.microsoft.com/office/powerpoint/2010/main" spd="slow" p14:dur="1250">
         <p15:prstTrans prst="peelOff"/>
       </p:transition>
     </mc:Choice>
-    <mc:Fallback>
+    <mc:Fallback xmlns="">
       <p:transition spd="slow">
         <p:fade/>
       </p:transition>
@@ -10344,13 +9483,13 @@
   <p:clrMapOvr>
     <a:masterClrMapping/>
   </p:clrMapOvr>
-  <mc:AlternateContent xmlns:mc="http://schemas.openxmlformats.org/markup-compatibility/2006">
-    <mc:Choice xmlns:p15="http://schemas.microsoft.com/office/powerpoint/2012/main" Requires="p15">
+  <mc:AlternateContent xmlns:mc="http://schemas.openxmlformats.org/markup-compatibility/2006" xmlns:p15="http://schemas.microsoft.com/office/powerpoint/2012/main">
+    <mc:Choice Requires="p15">
       <p:transition xmlns:p14="http://schemas.microsoft.com/office/powerpoint/2010/main" spd="slow" p14:dur="1250">
         <p15:prstTrans prst="peelOff"/>
       </p:transition>
     </mc:Choice>
-    <mc:Fallback>
+    <mc:Fallback xmlns="">
       <p:transition spd="slow">
         <p:fade/>
       </p:transition>
@@ -11654,13 +10793,13 @@
   <p:clrMapOvr>
     <a:masterClrMapping/>
   </p:clrMapOvr>
-  <mc:AlternateContent xmlns:mc="http://schemas.openxmlformats.org/markup-compatibility/2006">
-    <mc:Choice xmlns:p15="http://schemas.microsoft.com/office/powerpoint/2012/main" Requires="p15">
+  <mc:AlternateContent xmlns:mc="http://schemas.openxmlformats.org/markup-compatibility/2006" xmlns:p15="http://schemas.microsoft.com/office/powerpoint/2012/main">
+    <mc:Choice Requires="p15">
       <p:transition xmlns:p14="http://schemas.microsoft.com/office/powerpoint/2010/main" spd="slow" p14:dur="1250">
         <p15:prstTrans prst="peelOff"/>
       </p:transition>
     </mc:Choice>
-    <mc:Fallback>
+    <mc:Fallback xmlns="">
       <p:transition spd="slow">
         <p:fade/>
       </p:transition>
@@ -12647,13 +11786,13 @@
   <p:clrMapOvr>
     <a:masterClrMapping/>
   </p:clrMapOvr>
-  <mc:AlternateContent xmlns:mc="http://schemas.openxmlformats.org/markup-compatibility/2006">
-    <mc:Choice xmlns:p15="http://schemas.microsoft.com/office/powerpoint/2012/main" Requires="p15">
+  <mc:AlternateContent xmlns:mc="http://schemas.openxmlformats.org/markup-compatibility/2006" xmlns:p15="http://schemas.microsoft.com/office/powerpoint/2012/main">
+    <mc:Choice Requires="p15">
       <p:transition xmlns:p14="http://schemas.microsoft.com/office/powerpoint/2010/main" spd="slow" p14:dur="1250">
         <p15:prstTrans prst="peelOff"/>
       </p:transition>
     </mc:Choice>
-    <mc:Fallback>
+    <mc:Fallback xmlns="">
       <p:transition spd="slow">
         <p:fade/>
       </p:transition>
@@ -13382,13 +12521,13 @@
   <p:clrMapOvr>
     <a:masterClrMapping/>
   </p:clrMapOvr>
-  <mc:AlternateContent xmlns:mc="http://schemas.openxmlformats.org/markup-compatibility/2006">
-    <mc:Choice xmlns:p15="http://schemas.microsoft.com/office/powerpoint/2012/main" Requires="p15">
+  <mc:AlternateContent xmlns:mc="http://schemas.openxmlformats.org/markup-compatibility/2006" xmlns:p15="http://schemas.microsoft.com/office/powerpoint/2012/main">
+    <mc:Choice Requires="p15">
       <p:transition xmlns:p14="http://schemas.microsoft.com/office/powerpoint/2010/main" spd="slow" p14:dur="1250">
         <p15:prstTrans prst="peelOff"/>
       </p:transition>
     </mc:Choice>
-    <mc:Fallback>
+    <mc:Fallback xmlns="">
       <p:transition spd="slow">
         <p:fade/>
       </p:transition>
@@ -13973,13 +13112,13 @@
   <p:clrMapOvr>
     <a:masterClrMapping/>
   </p:clrMapOvr>
-  <mc:AlternateContent xmlns:mc="http://schemas.openxmlformats.org/markup-compatibility/2006">
-    <mc:Choice xmlns:p15="http://schemas.microsoft.com/office/powerpoint/2012/main" Requires="p15">
+  <mc:AlternateContent xmlns:mc="http://schemas.openxmlformats.org/markup-compatibility/2006" xmlns:p15="http://schemas.microsoft.com/office/powerpoint/2012/main">
+    <mc:Choice Requires="p15">
       <p:transition xmlns:p14="http://schemas.microsoft.com/office/powerpoint/2010/main" spd="slow" p14:dur="1250">
         <p15:prstTrans prst="peelOff"/>
       </p:transition>
     </mc:Choice>
-    <mc:Fallback>
+    <mc:Fallback xmlns="">
       <p:transition spd="slow">
         <p:fade/>
       </p:transition>
@@ -15124,13 +14263,13 @@
   <p:clrMapOvr>
     <a:masterClrMapping/>
   </p:clrMapOvr>
-  <mc:AlternateContent xmlns:mc="http://schemas.openxmlformats.org/markup-compatibility/2006">
-    <mc:Choice xmlns:p15="http://schemas.microsoft.com/office/powerpoint/2012/main" Requires="p15">
+  <mc:AlternateContent xmlns:mc="http://schemas.openxmlformats.org/markup-compatibility/2006" xmlns:p15="http://schemas.microsoft.com/office/powerpoint/2012/main">
+    <mc:Choice Requires="p15">
       <p:transition xmlns:p14="http://schemas.microsoft.com/office/powerpoint/2010/main" spd="slow" p14:dur="1250">
         <p15:prstTrans prst="peelOff"/>
       </p:transition>
     </mc:Choice>
-    <mc:Fallback>
+    <mc:Fallback xmlns="">
       <p:transition spd="slow">
         <p:fade/>
       </p:transition>
@@ -15648,13 +14787,13 @@
   <p:clrMapOvr>
     <a:masterClrMapping/>
   </p:clrMapOvr>
-  <mc:AlternateContent xmlns:mc="http://schemas.openxmlformats.org/markup-compatibility/2006">
-    <mc:Choice xmlns:p15="http://schemas.microsoft.com/office/powerpoint/2012/main" Requires="p15">
+  <mc:AlternateContent xmlns:mc="http://schemas.openxmlformats.org/markup-compatibility/2006" xmlns:p15="http://schemas.microsoft.com/office/powerpoint/2012/main">
+    <mc:Choice Requires="p15">
       <p:transition xmlns:p14="http://schemas.microsoft.com/office/powerpoint/2010/main" spd="slow" p14:dur="1250">
         <p15:prstTrans prst="peelOff"/>
       </p:transition>
     </mc:Choice>
-    <mc:Fallback>
+    <mc:Fallback xmlns="">
       <p:transition spd="slow">
         <p:fade/>
       </p:transition>
@@ -16167,13 +15306,13 @@
   <p:clrMapOvr>
     <a:masterClrMapping/>
   </p:clrMapOvr>
-  <mc:AlternateContent xmlns:mc="http://schemas.openxmlformats.org/markup-compatibility/2006">
-    <mc:Choice xmlns:p15="http://schemas.microsoft.com/office/powerpoint/2012/main" Requires="p15">
+  <mc:AlternateContent xmlns:mc="http://schemas.openxmlformats.org/markup-compatibility/2006" xmlns:p15="http://schemas.microsoft.com/office/powerpoint/2012/main">
+    <mc:Choice Requires="p15">
       <p:transition xmlns:p14="http://schemas.microsoft.com/office/powerpoint/2010/main" spd="slow" p14:dur="1250">
         <p15:prstTrans prst="peelOff"/>
       </p:transition>
     </mc:Choice>
-    <mc:Fallback>
+    <mc:Fallback xmlns="">
       <p:transition spd="slow">
         <p:fade/>
       </p:transition>
@@ -16359,13 +15498,13 @@
   <p:clrMapOvr>
     <a:masterClrMapping/>
   </p:clrMapOvr>
-  <mc:AlternateContent xmlns:mc="http://schemas.openxmlformats.org/markup-compatibility/2006">
-    <mc:Choice xmlns:p15="http://schemas.microsoft.com/office/powerpoint/2012/main" Requires="p15">
+  <mc:AlternateContent xmlns:mc="http://schemas.openxmlformats.org/markup-compatibility/2006" xmlns:p15="http://schemas.microsoft.com/office/powerpoint/2012/main">
+    <mc:Choice Requires="p15">
       <p:transition xmlns:p14="http://schemas.microsoft.com/office/powerpoint/2010/main" spd="slow" p14:dur="1250">
         <p15:prstTrans prst="peelOff"/>
       </p:transition>
     </mc:Choice>
-    <mc:Fallback>
+    <mc:Fallback xmlns="">
       <p:transition spd="slow">
         <p:fade/>
       </p:transition>
@@ -17420,13 +16559,13 @@
   <p:clrMapOvr>
     <a:masterClrMapping/>
   </p:clrMapOvr>
-  <mc:AlternateContent xmlns:mc="http://schemas.openxmlformats.org/markup-compatibility/2006">
-    <mc:Choice xmlns:p15="http://schemas.microsoft.com/office/powerpoint/2012/main" Requires="p15">
+  <mc:AlternateContent xmlns:mc="http://schemas.openxmlformats.org/markup-compatibility/2006" xmlns:p15="http://schemas.microsoft.com/office/powerpoint/2012/main">
+    <mc:Choice Requires="p15">
       <p:transition xmlns:p14="http://schemas.microsoft.com/office/powerpoint/2010/main" spd="slow" p14:dur="1250">
         <p15:prstTrans prst="peelOff"/>
       </p:transition>
     </mc:Choice>
-    <mc:Fallback>
+    <mc:Fallback xmlns="">
       <p:transition spd="slow">
         <p:fade/>
       </p:transition>
@@ -18409,13 +17548,13 @@
   <p:clrMapOvr>
     <a:masterClrMapping/>
   </p:clrMapOvr>
-  <mc:AlternateContent xmlns:mc="http://schemas.openxmlformats.org/markup-compatibility/2006">
-    <mc:Choice xmlns:p15="http://schemas.microsoft.com/office/powerpoint/2012/main" Requires="p15">
+  <mc:AlternateContent xmlns:mc="http://schemas.openxmlformats.org/markup-compatibility/2006" xmlns:p15="http://schemas.microsoft.com/office/powerpoint/2012/main">
+    <mc:Choice Requires="p15">
       <p:transition xmlns:p14="http://schemas.microsoft.com/office/powerpoint/2010/main" spd="slow" p14:dur="1250">
         <p15:prstTrans prst="peelOff"/>
       </p:transition>
     </mc:Choice>
-    <mc:Fallback>
+    <mc:Fallback xmlns="">
       <p:transition spd="slow">
         <p:fade/>
       </p:transition>
@@ -18928,13 +18067,13 @@
   <p:clrMapOvr>
     <a:masterClrMapping/>
   </p:clrMapOvr>
-  <mc:AlternateContent xmlns:mc="http://schemas.openxmlformats.org/markup-compatibility/2006">
-    <mc:Choice xmlns:p15="http://schemas.microsoft.com/office/powerpoint/2012/main" Requires="p15">
+  <mc:AlternateContent xmlns:mc="http://schemas.openxmlformats.org/markup-compatibility/2006" xmlns:p15="http://schemas.microsoft.com/office/powerpoint/2012/main">
+    <mc:Choice Requires="p15">
       <p:transition xmlns:p14="http://schemas.microsoft.com/office/powerpoint/2010/main" spd="slow" p14:dur="1250">
         <p15:prstTrans prst="peelOff"/>
       </p:transition>
     </mc:Choice>
-    <mc:Fallback>
+    <mc:Fallback xmlns="">
       <p:transition spd="slow">
         <p:fade/>
       </p:transition>
@@ -19824,13 +18963,13 @@
   <p:clrMapOvr>
     <a:masterClrMapping/>
   </p:clrMapOvr>
-  <mc:AlternateContent xmlns:mc="http://schemas.openxmlformats.org/markup-compatibility/2006">
-    <mc:Choice xmlns:p15="http://schemas.microsoft.com/office/powerpoint/2012/main" Requires="p15">
+  <mc:AlternateContent xmlns:mc="http://schemas.openxmlformats.org/markup-compatibility/2006" xmlns:p15="http://schemas.microsoft.com/office/powerpoint/2012/main">
+    <mc:Choice Requires="p15">
       <p:transition xmlns:p14="http://schemas.microsoft.com/office/powerpoint/2010/main" spd="slow" p14:dur="1250">
         <p15:prstTrans prst="peelOff"/>
       </p:transition>
     </mc:Choice>
-    <mc:Fallback>
+    <mc:Fallback xmlns="">
       <p:transition spd="slow">
         <p:fade/>
       </p:transition>
@@ -21322,13 +20461,13 @@
   <p:clrMapOvr>
     <a:masterClrMapping/>
   </p:clrMapOvr>
-  <mc:AlternateContent xmlns:mc="http://schemas.openxmlformats.org/markup-compatibility/2006">
-    <mc:Choice xmlns:p15="http://schemas.microsoft.com/office/powerpoint/2012/main" Requires="p15">
+  <mc:AlternateContent xmlns:mc="http://schemas.openxmlformats.org/markup-compatibility/2006" xmlns:p15="http://schemas.microsoft.com/office/powerpoint/2012/main">
+    <mc:Choice Requires="p15">
       <p:transition xmlns:p14="http://schemas.microsoft.com/office/powerpoint/2010/main" spd="slow" p14:dur="1250">
         <p15:prstTrans prst="peelOff"/>
       </p:transition>
     </mc:Choice>
-    <mc:Fallback>
+    <mc:Fallback xmlns="">
       <p:transition spd="slow">
         <p:fade/>
       </p:transition>
@@ -22183,13 +21322,13 @@
   <p:clrMapOvr>
     <a:masterClrMapping/>
   </p:clrMapOvr>
-  <mc:AlternateContent xmlns:mc="http://schemas.openxmlformats.org/markup-compatibility/2006">
-    <mc:Choice xmlns:p15="http://schemas.microsoft.com/office/powerpoint/2012/main" Requires="p15">
+  <mc:AlternateContent xmlns:mc="http://schemas.openxmlformats.org/markup-compatibility/2006" xmlns:p15="http://schemas.microsoft.com/office/powerpoint/2012/main">
+    <mc:Choice Requires="p15">
       <p:transition xmlns:p14="http://schemas.microsoft.com/office/powerpoint/2010/main" spd="slow" p14:dur="1250">
         <p15:prstTrans prst="peelOff"/>
       </p:transition>
     </mc:Choice>
-    <mc:Fallback>
+    <mc:Fallback xmlns="">
       <p:transition spd="slow">
         <p:fade/>
       </p:transition>
@@ -22957,13 +22096,13 @@
   <p:clrMapOvr>
     <a:masterClrMapping/>
   </p:clrMapOvr>
-  <mc:AlternateContent xmlns:mc="http://schemas.openxmlformats.org/markup-compatibility/2006">
-    <mc:Choice xmlns:p15="http://schemas.microsoft.com/office/powerpoint/2012/main" Requires="p15">
+  <mc:AlternateContent xmlns:mc="http://schemas.openxmlformats.org/markup-compatibility/2006" xmlns:p15="http://schemas.microsoft.com/office/powerpoint/2012/main">
+    <mc:Choice Requires="p15">
       <p:transition xmlns:p14="http://schemas.microsoft.com/office/powerpoint/2010/main" spd="slow" p14:dur="1250">
         <p15:prstTrans prst="peelOff"/>
       </p:transition>
     </mc:Choice>
-    <mc:Fallback>
+    <mc:Fallback xmlns="">
       <p:transition spd="slow">
         <p:fade/>
       </p:transition>
@@ -23845,13 +22984,13 @@
   <p:clrMapOvr>
     <a:masterClrMapping/>
   </p:clrMapOvr>
-  <mc:AlternateContent xmlns:mc="http://schemas.openxmlformats.org/markup-compatibility/2006">
-    <mc:Choice xmlns:p15="http://schemas.microsoft.com/office/powerpoint/2012/main" Requires="p15">
+  <mc:AlternateContent xmlns:mc="http://schemas.openxmlformats.org/markup-compatibility/2006" xmlns:p15="http://schemas.microsoft.com/office/powerpoint/2012/main">
+    <mc:Choice Requires="p15">
       <p:transition xmlns:p14="http://schemas.microsoft.com/office/powerpoint/2010/main" spd="slow" p14:dur="1250">
         <p15:prstTrans prst="peelOff"/>
       </p:transition>
     </mc:Choice>
-    <mc:Fallback>
+    <mc:Fallback xmlns="">
       <p:transition spd="slow">
         <p:fade/>
       </p:transition>
@@ -24730,13 +23869,13 @@
   <p:clrMapOvr>
     <a:masterClrMapping/>
   </p:clrMapOvr>
-  <mc:AlternateContent xmlns:mc="http://schemas.openxmlformats.org/markup-compatibility/2006">
-    <mc:Choice xmlns:p15="http://schemas.microsoft.com/office/powerpoint/2012/main" Requires="p15">
+  <mc:AlternateContent xmlns:mc="http://schemas.openxmlformats.org/markup-compatibility/2006" xmlns:p15="http://schemas.microsoft.com/office/powerpoint/2012/main">
+    <mc:Choice Requires="p15">
       <p:transition xmlns:p14="http://schemas.microsoft.com/office/powerpoint/2010/main" spd="slow" p14:dur="1250">
         <p15:prstTrans prst="peelOff"/>
       </p:transition>
     </mc:Choice>
-    <mc:Fallback>
+    <mc:Fallback xmlns="">
       <p:transition spd="slow">
         <p:fade/>
       </p:transition>
@@ -24949,13 +24088,13 @@
   <p:clrMapOvr>
     <a:masterClrMapping/>
   </p:clrMapOvr>
-  <mc:AlternateContent xmlns:mc="http://schemas.openxmlformats.org/markup-compatibility/2006">
-    <mc:Choice xmlns:p15="http://schemas.microsoft.com/office/powerpoint/2012/main" Requires="p15">
+  <mc:AlternateContent xmlns:mc="http://schemas.openxmlformats.org/markup-compatibility/2006" xmlns:p15="http://schemas.microsoft.com/office/powerpoint/2012/main">
+    <mc:Choice Requires="p15">
       <p:transition xmlns:p14="http://schemas.microsoft.com/office/powerpoint/2010/main" spd="slow" p14:dur="1250">
         <p15:prstTrans prst="peelOff"/>
       </p:transition>
     </mc:Choice>
-    <mc:Fallback>
+    <mc:Fallback xmlns="">
       <p:transition spd="slow">
         <p:fade/>
       </p:transition>
@@ -25765,13 +24904,13 @@
   <p:clrMapOvr>
     <a:masterClrMapping/>
   </p:clrMapOvr>
-  <mc:AlternateContent xmlns:mc="http://schemas.openxmlformats.org/markup-compatibility/2006">
-    <mc:Choice xmlns:p15="http://schemas.microsoft.com/office/powerpoint/2012/main" Requires="p15">
+  <mc:AlternateContent xmlns:mc="http://schemas.openxmlformats.org/markup-compatibility/2006" xmlns:p15="http://schemas.microsoft.com/office/powerpoint/2012/main">
+    <mc:Choice Requires="p15">
       <p:transition xmlns:p14="http://schemas.microsoft.com/office/powerpoint/2010/main" spd="slow" p14:dur="1250">
         <p15:prstTrans prst="peelOff"/>
       </p:transition>
     </mc:Choice>
-    <mc:Fallback>
+    <mc:Fallback xmlns="">
       <p:transition spd="slow">
         <p:fade/>
       </p:transition>
@@ -26446,13 +25585,13 @@
   <p:clrMapOvr>
     <a:masterClrMapping/>
   </p:clrMapOvr>
-  <mc:AlternateContent xmlns:mc="http://schemas.openxmlformats.org/markup-compatibility/2006">
-    <mc:Choice xmlns:p15="http://schemas.microsoft.com/office/powerpoint/2012/main" Requires="p15">
+  <mc:AlternateContent xmlns:mc="http://schemas.openxmlformats.org/markup-compatibility/2006" xmlns:p15="http://schemas.microsoft.com/office/powerpoint/2012/main">
+    <mc:Choice Requires="p15">
       <p:transition xmlns:p14="http://schemas.microsoft.com/office/powerpoint/2010/main" spd="slow" p14:dur="1250">
         <p15:prstTrans prst="peelOff"/>
       </p:transition>
     </mc:Choice>
-    <mc:Fallback>
+    <mc:Fallback xmlns="">
       <p:transition spd="slow">
         <p:fade/>
       </p:transition>
@@ -26922,13 +26061,13 @@
   <p:clrMapOvr>
     <a:masterClrMapping/>
   </p:clrMapOvr>
-  <mc:AlternateContent xmlns:mc="http://schemas.openxmlformats.org/markup-compatibility/2006">
-    <mc:Choice xmlns:p15="http://schemas.microsoft.com/office/powerpoint/2012/main" Requires="p15">
+  <mc:AlternateContent xmlns:mc="http://schemas.openxmlformats.org/markup-compatibility/2006" xmlns:p15="http://schemas.microsoft.com/office/powerpoint/2012/main">
+    <mc:Choice Requires="p15">
       <p:transition xmlns:p14="http://schemas.microsoft.com/office/powerpoint/2010/main" spd="slow" p14:dur="1250">
         <p15:prstTrans prst="peelOff"/>
       </p:transition>
     </mc:Choice>
-    <mc:Fallback>
+    <mc:Fallback xmlns="">
       <p:transition spd="slow">
         <p:fade/>
       </p:transition>
@@ -27971,13 +27110,13 @@
   <p:clrMapOvr>
     <a:masterClrMapping/>
   </p:clrMapOvr>
-  <mc:AlternateContent xmlns:mc="http://schemas.openxmlformats.org/markup-compatibility/2006">
-    <mc:Choice xmlns:p15="http://schemas.microsoft.com/office/powerpoint/2012/main" Requires="p15">
+  <mc:AlternateContent xmlns:mc="http://schemas.openxmlformats.org/markup-compatibility/2006" xmlns:p15="http://schemas.microsoft.com/office/powerpoint/2012/main">
+    <mc:Choice Requires="p15">
       <p:transition xmlns:p14="http://schemas.microsoft.com/office/powerpoint/2010/main" spd="slow" p14:dur="1250">
         <p15:prstTrans prst="peelOff"/>
       </p:transition>
     </mc:Choice>
-    <mc:Fallback>
+    <mc:Fallback xmlns="">
       <p:transition spd="slow">
         <p:fade/>
       </p:transition>
@@ -28692,13 +27831,13 @@
   <p:clrMapOvr>
     <a:masterClrMapping/>
   </p:clrMapOvr>
-  <mc:AlternateContent xmlns:mc="http://schemas.openxmlformats.org/markup-compatibility/2006">
-    <mc:Choice xmlns:p15="http://schemas.microsoft.com/office/powerpoint/2012/main" Requires="p15">
+  <mc:AlternateContent xmlns:mc="http://schemas.openxmlformats.org/markup-compatibility/2006" xmlns:p15="http://schemas.microsoft.com/office/powerpoint/2012/main">
+    <mc:Choice Requires="p15">
       <p:transition xmlns:p14="http://schemas.microsoft.com/office/powerpoint/2010/main" spd="slow" p14:dur="1250">
         <p15:prstTrans prst="peelOff"/>
       </p:transition>
     </mc:Choice>
-    <mc:Fallback>
+    <mc:Fallback xmlns="">
       <p:transition spd="slow">
         <p:fade/>
       </p:transition>
@@ -29741,13 +28880,13 @@
   <p:clrMapOvr>
     <a:masterClrMapping/>
   </p:clrMapOvr>
-  <mc:AlternateContent xmlns:mc="http://schemas.openxmlformats.org/markup-compatibility/2006">
-    <mc:Choice xmlns:p15="http://schemas.microsoft.com/office/powerpoint/2012/main" Requires="p15">
+  <mc:AlternateContent xmlns:mc="http://schemas.openxmlformats.org/markup-compatibility/2006" xmlns:p15="http://schemas.microsoft.com/office/powerpoint/2012/main">
+    <mc:Choice Requires="p15">
       <p:transition xmlns:p14="http://schemas.microsoft.com/office/powerpoint/2010/main" spd="slow" p14:dur="1250">
         <p15:prstTrans prst="peelOff"/>
       </p:transition>
     </mc:Choice>
-    <mc:Fallback>
+    <mc:Fallback xmlns="">
       <p:transition spd="slow">
         <p:fade/>
       </p:transition>
@@ -30260,13 +29399,13 @@
   <p:clrMapOvr>
     <a:masterClrMapping/>
   </p:clrMapOvr>
-  <mc:AlternateContent xmlns:mc="http://schemas.openxmlformats.org/markup-compatibility/2006">
-    <mc:Choice xmlns:p15="http://schemas.microsoft.com/office/powerpoint/2012/main" Requires="p15">
+  <mc:AlternateContent xmlns:mc="http://schemas.openxmlformats.org/markup-compatibility/2006" xmlns:p15="http://schemas.microsoft.com/office/powerpoint/2012/main">
+    <mc:Choice Requires="p15">
       <p:transition xmlns:p14="http://schemas.microsoft.com/office/powerpoint/2010/main" spd="slow" p14:dur="1250">
         <p15:prstTrans prst="peelOff"/>
       </p:transition>
     </mc:Choice>
-    <mc:Fallback>
+    <mc:Fallback xmlns="">
       <p:transition spd="slow">
         <p:fade/>
       </p:transition>
@@ -30695,13 +29834,13 @@
   <p:clrMapOvr>
     <a:masterClrMapping/>
   </p:clrMapOvr>
-  <mc:AlternateContent xmlns:mc="http://schemas.openxmlformats.org/markup-compatibility/2006">
-    <mc:Choice xmlns:p15="http://schemas.microsoft.com/office/powerpoint/2012/main" Requires="p15">
+  <mc:AlternateContent xmlns:mc="http://schemas.openxmlformats.org/markup-compatibility/2006" xmlns:p15="http://schemas.microsoft.com/office/powerpoint/2012/main">
+    <mc:Choice Requires="p15">
       <p:transition xmlns:p14="http://schemas.microsoft.com/office/powerpoint/2010/main" spd="slow" p14:dur="1250">
         <p15:prstTrans prst="peelOff"/>
       </p:transition>
     </mc:Choice>
-    <mc:Fallback>
+    <mc:Fallback xmlns="">
       <p:transition spd="slow">
         <p:fade/>
       </p:transition>
@@ -31511,13 +30650,13 @@
   <p:clrMapOvr>
     <a:masterClrMapping/>
   </p:clrMapOvr>
-  <mc:AlternateContent xmlns:mc="http://schemas.openxmlformats.org/markup-compatibility/2006">
-    <mc:Choice xmlns:p15="http://schemas.microsoft.com/office/powerpoint/2012/main" Requires="p15">
+  <mc:AlternateContent xmlns:mc="http://schemas.openxmlformats.org/markup-compatibility/2006" xmlns:p15="http://schemas.microsoft.com/office/powerpoint/2012/main">
+    <mc:Choice Requires="p15">
       <p:transition xmlns:p14="http://schemas.microsoft.com/office/powerpoint/2010/main" spd="slow" p14:dur="1250">
         <p15:prstTrans prst="peelOff"/>
       </p:transition>
     </mc:Choice>
-    <mc:Fallback>
+    <mc:Fallback xmlns="">
       <p:transition spd="slow">
         <p:fade/>
       </p:transition>
@@ -31952,13 +31091,13 @@
   <p:clrMapOvr>
     <a:masterClrMapping/>
   </p:clrMapOvr>
-  <mc:AlternateContent xmlns:mc="http://schemas.openxmlformats.org/markup-compatibility/2006">
-    <mc:Choice xmlns:p15="http://schemas.microsoft.com/office/powerpoint/2012/main" Requires="p15">
+  <mc:AlternateContent xmlns:mc="http://schemas.openxmlformats.org/markup-compatibility/2006" xmlns:p15="http://schemas.microsoft.com/office/powerpoint/2012/main">
+    <mc:Choice Requires="p15">
       <p:transition xmlns:p14="http://schemas.microsoft.com/office/powerpoint/2010/main" spd="slow" p14:dur="1250">
         <p15:prstTrans prst="peelOff"/>
       </p:transition>
     </mc:Choice>
-    <mc:Fallback>
+    <mc:Fallback xmlns="">
       <p:transition spd="slow">
         <p:fade/>
       </p:transition>
@@ -32681,13 +31820,13 @@
   <p:clrMapOvr>
     <a:masterClrMapping/>
   </p:clrMapOvr>
-  <mc:AlternateContent xmlns:mc="http://schemas.openxmlformats.org/markup-compatibility/2006">
-    <mc:Choice xmlns:p15="http://schemas.microsoft.com/office/powerpoint/2012/main" Requires="p15">
+  <mc:AlternateContent xmlns:mc="http://schemas.openxmlformats.org/markup-compatibility/2006" xmlns:p15="http://schemas.microsoft.com/office/powerpoint/2012/main">
+    <mc:Choice Requires="p15">
       <p:transition xmlns:p14="http://schemas.microsoft.com/office/powerpoint/2010/main" spd="slow" p14:dur="1250">
         <p15:prstTrans prst="peelOff"/>
       </p:transition>
     </mc:Choice>
-    <mc:Fallback>
+    <mc:Fallback xmlns="">
       <p:transition spd="slow">
         <p:fade/>
       </p:transition>
@@ -33470,13 +32609,13 @@
   <p:clrMapOvr>
     <a:masterClrMapping/>
   </p:clrMapOvr>
-  <mc:AlternateContent xmlns:mc="http://schemas.openxmlformats.org/markup-compatibility/2006">
-    <mc:Choice xmlns:p15="http://schemas.microsoft.com/office/powerpoint/2012/main" Requires="p15">
+  <mc:AlternateContent xmlns:mc="http://schemas.openxmlformats.org/markup-compatibility/2006" xmlns:p15="http://schemas.microsoft.com/office/powerpoint/2012/main">
+    <mc:Choice Requires="p15">
       <p:transition xmlns:p14="http://schemas.microsoft.com/office/powerpoint/2010/main" spd="slow" p14:dur="1250">
         <p15:prstTrans prst="peelOff"/>
       </p:transition>
     </mc:Choice>
-    <mc:Fallback>
+    <mc:Fallback xmlns="">
       <p:transition spd="slow">
         <p:fade/>
       </p:transition>
@@ -33726,13 +32865,13 @@
   <p:clrMapOvr>
     <a:masterClrMapping/>
   </p:clrMapOvr>
-  <mc:AlternateContent xmlns:mc="http://schemas.openxmlformats.org/markup-compatibility/2006">
-    <mc:Choice xmlns:p15="http://schemas.microsoft.com/office/powerpoint/2012/main" Requires="p15">
+  <mc:AlternateContent xmlns:mc="http://schemas.openxmlformats.org/markup-compatibility/2006" xmlns:p15="http://schemas.microsoft.com/office/powerpoint/2012/main">
+    <mc:Choice Requires="p15">
       <p:transition xmlns:p14="http://schemas.microsoft.com/office/powerpoint/2010/main" spd="slow" p14:dur="1250">
         <p15:prstTrans prst="peelOff"/>
       </p:transition>
     </mc:Choice>
-    <mc:Fallback>
+    <mc:Fallback xmlns="">
       <p:transition spd="slow">
         <p:fade/>
       </p:transition>
@@ -34212,13 +33351,13 @@
   <p:clrMapOvr>
     <a:masterClrMapping/>
   </p:clrMapOvr>
-  <mc:AlternateContent xmlns:mc="http://schemas.openxmlformats.org/markup-compatibility/2006">
-    <mc:Choice xmlns:p15="http://schemas.microsoft.com/office/powerpoint/2012/main" Requires="p15">
+  <mc:AlternateContent xmlns:mc="http://schemas.openxmlformats.org/markup-compatibility/2006" xmlns:p15="http://schemas.microsoft.com/office/powerpoint/2012/main">
+    <mc:Choice Requires="p15">
       <p:transition xmlns:p14="http://schemas.microsoft.com/office/powerpoint/2010/main" spd="slow" p14:dur="1250">
         <p15:prstTrans prst="peelOff"/>
       </p:transition>
     </mc:Choice>
-    <mc:Fallback>
+    <mc:Fallback xmlns="">
       <p:transition spd="slow">
         <p:fade/>
       </p:transition>
@@ -34878,13 +34017,13 @@
   <p:clrMapOvr>
     <a:masterClrMapping/>
   </p:clrMapOvr>
-  <mc:AlternateContent xmlns:mc="http://schemas.openxmlformats.org/markup-compatibility/2006">
-    <mc:Choice xmlns:p15="http://schemas.microsoft.com/office/powerpoint/2012/main" Requires="p15">
+  <mc:AlternateContent xmlns:mc="http://schemas.openxmlformats.org/markup-compatibility/2006" xmlns:p15="http://schemas.microsoft.com/office/powerpoint/2012/main">
+    <mc:Choice Requires="p15">
       <p:transition xmlns:p14="http://schemas.microsoft.com/office/powerpoint/2010/main" spd="slow" p14:dur="1250">
         <p15:prstTrans prst="peelOff"/>
       </p:transition>
     </mc:Choice>
-    <mc:Fallback>
+    <mc:Fallback xmlns="">
       <p:transition spd="slow">
         <p:fade/>
       </p:transition>
@@ -35724,13 +34863,13 @@
   <p:clrMapOvr>
     <a:masterClrMapping/>
   </p:clrMapOvr>
-  <mc:AlternateContent xmlns:mc="http://schemas.openxmlformats.org/markup-compatibility/2006">
-    <mc:Choice xmlns:p15="http://schemas.microsoft.com/office/powerpoint/2012/main" Requires="p15">
+  <mc:AlternateContent xmlns:mc="http://schemas.openxmlformats.org/markup-compatibility/2006" xmlns:p15="http://schemas.microsoft.com/office/powerpoint/2012/main">
+    <mc:Choice Requires="p15">
       <p:transition xmlns:p14="http://schemas.microsoft.com/office/powerpoint/2010/main" spd="slow" p14:dur="1250">
         <p15:prstTrans prst="peelOff"/>
       </p:transition>
     </mc:Choice>
-    <mc:Fallback>
+    <mc:Fallback xmlns="">
       <p:transition spd="slow">
         <p:fade/>
       </p:transition>
@@ -36459,13 +35598,13 @@
   <p:clrMapOvr>
     <a:masterClrMapping/>
   </p:clrMapOvr>
-  <mc:AlternateContent xmlns:mc="http://schemas.openxmlformats.org/markup-compatibility/2006">
-    <mc:Choice xmlns:p15="http://schemas.microsoft.com/office/powerpoint/2012/main" Requires="p15">
+  <mc:AlternateContent xmlns:mc="http://schemas.openxmlformats.org/markup-compatibility/2006" xmlns:p15="http://schemas.microsoft.com/office/powerpoint/2012/main">
+    <mc:Choice Requires="p15">
       <p:transition xmlns:p14="http://schemas.microsoft.com/office/powerpoint/2010/main" spd="slow" p14:dur="1250">
         <p15:prstTrans prst="peelOff"/>
       </p:transition>
     </mc:Choice>
-    <mc:Fallback>
+    <mc:Fallback xmlns="">
       <p:transition spd="slow">
         <p:fade/>
       </p:transition>
@@ -37388,13 +36527,13 @@
   <p:clrMapOvr>
     <a:masterClrMapping/>
   </p:clrMapOvr>
-  <mc:AlternateContent xmlns:mc="http://schemas.openxmlformats.org/markup-compatibility/2006">
-    <mc:Choice xmlns:p15="http://schemas.microsoft.com/office/powerpoint/2012/main" Requires="p15">
+  <mc:AlternateContent xmlns:mc="http://schemas.openxmlformats.org/markup-compatibility/2006" xmlns:p15="http://schemas.microsoft.com/office/powerpoint/2012/main">
+    <mc:Choice Requires="p15">
       <p:transition xmlns:p14="http://schemas.microsoft.com/office/powerpoint/2010/main" spd="slow" p14:dur="1250">
         <p15:prstTrans prst="peelOff"/>
       </p:transition>
     </mc:Choice>
-    <mc:Fallback>
+    <mc:Fallback xmlns="">
       <p:transition spd="slow">
         <p:fade/>
       </p:transition>
@@ -38063,13 +37202,13 @@
   <p:clrMapOvr>
     <a:masterClrMapping/>
   </p:clrMapOvr>
-  <mc:AlternateContent xmlns:mc="http://schemas.openxmlformats.org/markup-compatibility/2006">
-    <mc:Choice xmlns:p15="http://schemas.microsoft.com/office/powerpoint/2012/main" Requires="p15">
+  <mc:AlternateContent xmlns:mc="http://schemas.openxmlformats.org/markup-compatibility/2006" xmlns:p15="http://schemas.microsoft.com/office/powerpoint/2012/main">
+    <mc:Choice Requires="p15">
       <p:transition xmlns:p14="http://schemas.microsoft.com/office/powerpoint/2010/main" spd="slow" p14:dur="1250">
         <p15:prstTrans prst="peelOff"/>
       </p:transition>
     </mc:Choice>
-    <mc:Fallback>
+    <mc:Fallback xmlns="">
       <p:transition spd="slow">
         <p:fade/>
       </p:transition>
@@ -38213,13 +37352,13 @@
   <p:clrMapOvr>
     <a:masterClrMapping/>
   </p:clrMapOvr>
-  <mc:AlternateContent xmlns:mc="http://schemas.openxmlformats.org/markup-compatibility/2006">
-    <mc:Choice xmlns:p15="http://schemas.microsoft.com/office/powerpoint/2012/main" Requires="p15">
+  <mc:AlternateContent xmlns:mc="http://schemas.openxmlformats.org/markup-compatibility/2006" xmlns:p15="http://schemas.microsoft.com/office/powerpoint/2012/main">
+    <mc:Choice Requires="p15">
       <p:transition xmlns:p14="http://schemas.microsoft.com/office/powerpoint/2010/main" spd="slow" p14:dur="1250">
         <p15:prstTrans prst="peelOff"/>
       </p:transition>
     </mc:Choice>
-    <mc:Fallback>
+    <mc:Fallback xmlns="">
       <p:transition spd="slow">
         <p:fade/>
       </p:transition>
@@ -39117,13 +38256,13 @@
   <p:clrMapOvr>
     <a:masterClrMapping/>
   </p:clrMapOvr>
-  <mc:AlternateContent xmlns:mc="http://schemas.openxmlformats.org/markup-compatibility/2006">
-    <mc:Choice xmlns:p15="http://schemas.microsoft.com/office/powerpoint/2012/main" Requires="p15">
+  <mc:AlternateContent xmlns:mc="http://schemas.openxmlformats.org/markup-compatibility/2006" xmlns:p15="http://schemas.microsoft.com/office/powerpoint/2012/main">
+    <mc:Choice Requires="p15">
       <p:transition xmlns:p14="http://schemas.microsoft.com/office/powerpoint/2010/main" spd="slow" p14:dur="1250">
         <p15:prstTrans prst="peelOff"/>
       </p:transition>
     </mc:Choice>
-    <mc:Fallback>
+    <mc:Fallback xmlns="">
       <p:transition spd="slow">
         <p:fade/>
       </p:transition>
@@ -39422,13 +38561,13 @@
   <p:clrMapOvr>
     <a:masterClrMapping/>
   </p:clrMapOvr>
-  <mc:AlternateContent xmlns:mc="http://schemas.openxmlformats.org/markup-compatibility/2006">
-    <mc:Choice xmlns:p15="http://schemas.microsoft.com/office/powerpoint/2012/main" Requires="p15">
+  <mc:AlternateContent xmlns:mc="http://schemas.openxmlformats.org/markup-compatibility/2006" xmlns:p15="http://schemas.microsoft.com/office/powerpoint/2012/main">
+    <mc:Choice Requires="p15">
       <p:transition xmlns:p14="http://schemas.microsoft.com/office/powerpoint/2010/main" spd="slow" p14:dur="1250">
         <p15:prstTrans prst="peelOff"/>
       </p:transition>
     </mc:Choice>
-    <mc:Fallback>
+    <mc:Fallback xmlns="">
       <p:transition spd="slow">
         <p:fade/>
       </p:transition>
@@ -40118,13 +39257,13 @@
   <p:clrMapOvr>
     <a:masterClrMapping/>
   </p:clrMapOvr>
-  <mc:AlternateContent xmlns:mc="http://schemas.openxmlformats.org/markup-compatibility/2006">
-    <mc:Choice xmlns:p15="http://schemas.microsoft.com/office/powerpoint/2012/main" Requires="p15">
+  <mc:AlternateContent xmlns:mc="http://schemas.openxmlformats.org/markup-compatibility/2006" xmlns:p15="http://schemas.microsoft.com/office/powerpoint/2012/main">
+    <mc:Choice Requires="p15">
       <p:transition xmlns:p14="http://schemas.microsoft.com/office/powerpoint/2010/main" spd="slow" p14:dur="1250">
         <p15:prstTrans prst="peelOff"/>
       </p:transition>
     </mc:Choice>
-    <mc:Fallback>
+    <mc:Fallback xmlns="">
       <p:transition spd="slow">
         <p:fade/>
       </p:transition>
@@ -40433,13 +39572,13 @@
   <p:clrMapOvr>
     <a:masterClrMapping/>
   </p:clrMapOvr>
-  <mc:AlternateContent xmlns:mc="http://schemas.openxmlformats.org/markup-compatibility/2006">
-    <mc:Choice xmlns:p15="http://schemas.microsoft.com/office/powerpoint/2012/main" Requires="p15">
+  <mc:AlternateContent xmlns:mc="http://schemas.openxmlformats.org/markup-compatibility/2006" xmlns:p15="http://schemas.microsoft.com/office/powerpoint/2012/main">
+    <mc:Choice Requires="p15">
       <p:transition xmlns:p14="http://schemas.microsoft.com/office/powerpoint/2010/main" spd="slow" p14:dur="1250">
         <p15:prstTrans prst="peelOff"/>
       </p:transition>
     </mc:Choice>
-    <mc:Fallback>
+    <mc:Fallback xmlns="">
       <p:transition spd="slow">
         <p:fade/>
       </p:transition>
@@ -41516,13 +40655,13 @@
   <p:clrMapOvr>
     <a:masterClrMapping/>
   </p:clrMapOvr>
-  <mc:AlternateContent xmlns:mc="http://schemas.openxmlformats.org/markup-compatibility/2006">
-    <mc:Choice xmlns:p15="http://schemas.microsoft.com/office/powerpoint/2012/main" Requires="p15">
+  <mc:AlternateContent xmlns:mc="http://schemas.openxmlformats.org/markup-compatibility/2006" xmlns:p15="http://schemas.microsoft.com/office/powerpoint/2012/main">
+    <mc:Choice Requires="p15">
       <p:transition xmlns:p14="http://schemas.microsoft.com/office/powerpoint/2010/main" spd="slow" p14:dur="1250">
         <p15:prstTrans prst="peelOff"/>
       </p:transition>
     </mc:Choice>
-    <mc:Fallback>
+    <mc:Fallback xmlns="">
       <p:transition spd="slow">
         <p:fade/>
       </p:transition>
@@ -42305,13 +41444,13 @@
   <p:clrMapOvr>
     <a:masterClrMapping/>
   </p:clrMapOvr>
-  <mc:AlternateContent xmlns:mc="http://schemas.openxmlformats.org/markup-compatibility/2006">
-    <mc:Choice xmlns:p15="http://schemas.microsoft.com/office/powerpoint/2012/main" Requires="p15">
+  <mc:AlternateContent xmlns:mc="http://schemas.openxmlformats.org/markup-compatibility/2006" xmlns:p15="http://schemas.microsoft.com/office/powerpoint/2012/main">
+    <mc:Choice Requires="p15">
       <p:transition xmlns:p14="http://schemas.microsoft.com/office/powerpoint/2010/main" spd="slow" p14:dur="1250">
         <p15:prstTrans prst="peelOff"/>
       </p:transition>
     </mc:Choice>
-    <mc:Fallback>
+    <mc:Fallback xmlns="">
       <p:transition spd="slow">
         <p:fade/>
       </p:transition>
@@ -43411,13 +42550,13 @@
   <p:clrMapOvr>
     <a:masterClrMapping/>
   </p:clrMapOvr>
-  <mc:AlternateContent xmlns:mc="http://schemas.openxmlformats.org/markup-compatibility/2006">
-    <mc:Choice xmlns:p15="http://schemas.microsoft.com/office/powerpoint/2012/main" Requires="p15">
+  <mc:AlternateContent xmlns:mc="http://schemas.openxmlformats.org/markup-compatibility/2006" xmlns:p15="http://schemas.microsoft.com/office/powerpoint/2012/main">
+    <mc:Choice Requires="p15">
       <p:transition xmlns:p14="http://schemas.microsoft.com/office/powerpoint/2010/main" spd="slow" p14:dur="1250">
         <p15:prstTrans prst="peelOff"/>
       </p:transition>
     </mc:Choice>
-    <mc:Fallback>
+    <mc:Fallback xmlns="">
       <p:transition spd="slow">
         <p:fade/>
       </p:transition>
@@ -44344,13 +43483,13 @@
   <p:clrMapOvr>
     <a:masterClrMapping/>
   </p:clrMapOvr>
-  <mc:AlternateContent xmlns:mc="http://schemas.openxmlformats.org/markup-compatibility/2006">
-    <mc:Choice xmlns:p15="http://schemas.microsoft.com/office/powerpoint/2012/main" Requires="p15">
+  <mc:AlternateContent xmlns:mc="http://schemas.openxmlformats.org/markup-compatibility/2006" xmlns:p15="http://schemas.microsoft.com/office/powerpoint/2012/main">
+    <mc:Choice Requires="p15">
       <p:transition xmlns:p14="http://schemas.microsoft.com/office/powerpoint/2010/main" spd="slow" p14:dur="1250">
         <p15:prstTrans prst="peelOff"/>
       </p:transition>
     </mc:Choice>
-    <mc:Fallback>
+    <mc:Fallback xmlns="">
       <p:transition spd="slow">
         <p:fade/>
       </p:transition>
@@ -44514,13 +43653,13 @@
   <p:clrMapOvr>
     <a:masterClrMapping/>
   </p:clrMapOvr>
-  <mc:AlternateContent xmlns:mc="http://schemas.openxmlformats.org/markup-compatibility/2006">
-    <mc:Choice xmlns:p15="http://schemas.microsoft.com/office/powerpoint/2012/main" Requires="p15">
+  <mc:AlternateContent xmlns:mc="http://schemas.openxmlformats.org/markup-compatibility/2006" xmlns:p15="http://schemas.microsoft.com/office/powerpoint/2012/main">
+    <mc:Choice Requires="p15">
       <p:transition xmlns:p14="http://schemas.microsoft.com/office/powerpoint/2010/main" spd="slow" p14:dur="1250">
         <p15:prstTrans prst="peelOff"/>
       </p:transition>
     </mc:Choice>
-    <mc:Fallback>
+    <mc:Fallback xmlns="">
       <p:transition spd="slow">
         <p:fade/>
       </p:transition>
@@ -45501,13 +44640,13 @@
   <p:clrMapOvr>
     <a:masterClrMapping/>
   </p:clrMapOvr>
-  <mc:AlternateContent xmlns:mc="http://schemas.openxmlformats.org/markup-compatibility/2006">
-    <mc:Choice xmlns:p15="http://schemas.microsoft.com/office/powerpoint/2012/main" Requires="p15">
+  <mc:AlternateContent xmlns:mc="http://schemas.openxmlformats.org/markup-compatibility/2006" xmlns:p15="http://schemas.microsoft.com/office/powerpoint/2012/main">
+    <mc:Choice Requires="p15">
       <p:transition xmlns:p14="http://schemas.microsoft.com/office/powerpoint/2010/main" spd="slow" p14:dur="1250">
         <p15:prstTrans prst="peelOff"/>
       </p:transition>
     </mc:Choice>
-    <mc:Fallback>
+    <mc:Fallback xmlns="">
       <p:transition spd="slow">
         <p:fade/>
       </p:transition>
